--- a/ground-vehicle/docs/courses/beginner-switch/l1_introduction.pptx
+++ b/ground-vehicle/docs/courses/beginner-switch/l1_introduction.pptx
@@ -10234,7 +10234,7 @@
       </p:sp>
       <p:sp>
         <p:nvSpPr>
-          <p:cNvPr id="7" name="Rounded Rectangle 6"/>
+          <p:cNvPr id="7" name="CODE_PANEL"/>
           <p:cNvSpPr/>
           <p:nvPr/>
         </p:nvSpPr>
@@ -13262,7 +13262,7 @@
       </p:sp>
       <p:sp>
         <p:nvSpPr>
-          <p:cNvPr id="7" name="Rounded Rectangle 6"/>
+          <p:cNvPr id="7" name="CODE_PANEL"/>
           <p:cNvSpPr/>
           <p:nvPr/>
         </p:nvSpPr>
@@ -15263,7 +15263,7 @@
       </p:sp>
       <p:sp>
         <p:nvSpPr>
-          <p:cNvPr id="7" name="Rounded Rectangle 6"/>
+          <p:cNvPr id="7" name="CODE_PANEL"/>
           <p:cNvSpPr/>
           <p:nvPr/>
         </p:nvSpPr>
@@ -15433,7 +15433,7 @@
                 </a:solidFill>
                 <a:latin typeface="Consolas"/>
               </a:rPr>
-              <a:t> </a:t>
+              <a:t>const int BRIGHTNESS = 60;    // master brightness, 0 to 255</a:t>
             </a:r>
           </a:p>
           <a:p>
@@ -15455,7 +15455,7 @@
                 </a:solidFill>
                 <a:latin typeface="Consolas"/>
               </a:rPr>
-              <a:t>Adafruit_NeoPixel strip(LED_COUNT, LED_PIN,</a:t>
+              <a:t> </a:t>
             </a:r>
           </a:p>
           <a:p>
@@ -15477,7 +15477,7 @@
                 </a:solidFill>
                 <a:latin typeface="Consolas"/>
               </a:rPr>
-              <a:t>                        NEO_GRB + NEO_KHZ800);</a:t>
+              <a:t>Adafruit_NeoPixel strip(LED_COUNT, LED_PIN, NEO_GRB + NEO_KHZ800);</a:t>
             </a:r>
           </a:p>
           <a:p>
@@ -15565,7 +15565,7 @@
                 </a:solidFill>
                 <a:latin typeface="Consolas"/>
               </a:rPr>
-              <a:t>  strip.setBrightness(60);</a:t>
+              <a:t>  strip.setBrightness(BRIGHTNESS);</a:t>
             </a:r>
           </a:p>
           <a:p>

--- a/ground-vehicle/docs/courses/beginner-switch/l1_introduction.pptx
+++ b/ground-vehicle/docs/courses/beginner-switch/l1_introduction.pptx
@@ -654,7 +654,7 @@
               <a:rPr sz="1200">
                 <a:latin typeface="Calibri"/>
               </a:rPr>
-              <a:t>Name each part while holding a vehicle, then put the labelled picture up on the next slide and let them match the two.</a:t>
+              <a:t>Name each part while holding a vehicle, then put the labeled picture up on the next slide and let them match the two.</a:t>
             </a:r>
           </a:p>
           <a:p>
@@ -1787,7 +1787,7 @@
               <a:rPr sz="1200">
                 <a:latin typeface="Calibri"/>
               </a:rPr>
-              <a:t>Get the fast finishers helping their neighbours rather than sitting idle.</a:t>
+              <a:t>Get the fast finishers helping their neighbors rather than sitting idle.</a:t>
             </a:r>
           </a:p>
           <a:p>
@@ -3027,7 +3027,7 @@
               <a:rPr sz="1200">
                 <a:latin typeface="Calibri"/>
               </a:rPr>
-              <a:t>The long leg is the anode and goes towards the pin. Backwards means no light and no damage, so let them find out.</a:t>
+              <a:t>The long leg is the anode and goes toward the pin. Backwards means no light and no damage, so let them find out.</a:t>
             </a:r>
           </a:p>
           <a:p>
@@ -5075,7 +5075,7 @@
               <a:rPr sz="1200">
                 <a:latin typeface="Calibri"/>
               </a:rPr>
-              <a:t>This is the slide to point at when somebody asks why they are doing maths in a robotics class.</a:t>
+              <a:t>This is the slide to point at when somebody asks why they are doing math in a robotics class.</a:t>
             </a:r>
           </a:p>
           <a:p>
@@ -5173,7 +5173,7 @@
               <a:rPr sz="1200">
                 <a:latin typeface="Calibri"/>
               </a:rPr>
-              <a:t>This is the slide to point at when somebody asks why they are doing maths in a robotics class.</a:t>
+              <a:t>This is the slide to point at when somebody asks why they are doing math in a robotics class.</a:t>
             </a:r>
           </a:p>
           <a:p>
@@ -9472,7 +9472,7 @@
       </p:sp>
       <p:pic>
         <p:nvPicPr>
-          <p:cNvPr id="6" name="Picture 5" descr="vehicle-parts-labelled.jpg"/>
+          <p:cNvPr id="6" name="Picture 5" descr="vehicle-parts-labeled.jpg"/>
           <p:cNvPicPr>
             <a:picLocks noChangeAspect="1"/>
           </p:cNvPicPr>
@@ -10072,7 +10072,7 @@
       </p:sp>
       <p:pic>
         <p:nvPicPr>
-          <p:cNvPr id="6" name="Picture 5" descr="vehicle-dev-system-labelled.jpg"/>
+          <p:cNvPr id="6" name="Picture 5" descr="vehicle-dev-system-labeled.jpg"/>
           <p:cNvPicPr>
             <a:picLocks noChangeAspect="1"/>
           </p:cNvPicPr>
@@ -11483,7 +11483,7 @@
                 </a:solidFill>
                 <a:latin typeface="Calibri"/>
               </a:rPr>
-              <a:t>Wheels are at the vehicle's vertical centre, so it runs either way up. Taken from floor level, mid-drive.</a:t>
+              <a:t>Wheels are at the vehicle's vertical center, so it runs either way up. Taken from floor level, mid-drive.</a:t>
             </a:r>
           </a:p>
         </p:txBody>
@@ -15608,7 +15608,7 @@
                 </a:solidFill>
                 <a:latin typeface="Calibri"/>
               </a:rPr>
-              <a:t>7.   Light any one of the 32 LEDs, in any colour</a:t>
+              <a:t>7.   Light any one of the 32 LEDs, in any color</a:t>
             </a:r>
           </a:p>
         </p:txBody>
@@ -16783,7 +16783,7 @@
                 </a:solidFill>
                 <a:latin typeface="Calibri"/>
               </a:rPr>
-              <a:t>If the install will not go through, pair up with a neighbour and carry on - you lose nothing today. Note down the error and we will sort the machine out afterwards.</a:t>
+              <a:t>If the install will not go through, pair up with a neighbor and carry on - you lose nothing today. Note down the error and we will sort the machine out afterwards.</a:t>
             </a:r>
           </a:p>
         </p:txBody>
@@ -24945,7 +24945,7 @@
                 </a:solidFill>
                 <a:latin typeface="Calibri"/>
               </a:rPr>
-              <a:t>Long leg of the LED towards the resistor and GPIO 2. Short leg towards ground. Backwards means no light, no damage - just turn it round.</a:t>
+              <a:t>Long leg of the LED toward the resistor and GPIO 2. Short leg toward ground. Backwards means no light, no damage - just turn it round.</a:t>
             </a:r>
           </a:p>
         </p:txBody>
@@ -31746,7 +31746,7 @@
                 </a:solidFill>
                 <a:latin typeface="Calibri"/>
               </a:rPr>
-              <a:t>5.  Change the two numbers in the maths section. PREDICT the answers before you upload, then check.</a:t>
+              <a:t>5.  Change the two numbers in the math section. PREDICT the answers before you upload, then check.</a:t>
             </a:r>
           </a:p>
           <a:p>
@@ -32544,7 +32544,7 @@
                 </a:solidFill>
                 <a:latin typeface="Calibri"/>
               </a:rPr>
-              <a:t>Send a colour message into the first one and it keeps the first message, then passes everything after it down the chain to the next.</a:t>
+              <a:t>Send a color message into the first one and it keeps the first message, then passes everything after it down the chain to the next.</a:t>
             </a:r>
           </a:p>
           <a:p>
@@ -32635,7 +32635,7 @@
                 </a:solidFill>
                 <a:latin typeface="Calibri"/>
               </a:rPr>
-              <a:t>Each one holds three LEDs: red, green and blue. Every colour you can make is a mixture of those three, each from 0 to 255.</a:t>
+              <a:t>Each one holds three LEDs: red, green and blue. Every color you can make is a mixture of those three, each from 0 to 255.</a:t>
             </a:r>
           </a:p>
         </p:txBody>
@@ -33533,7 +33533,7 @@
                 </a:solidFill>
                 <a:latin typeface="Calibri"/>
               </a:rPr>
-              <a:t>NEO_GRB says these LEDs want their colour data green first. NEO_KHZ800 is the speed it is clocked out at. Both are correct for the WS2812B parts we use.</a:t>
+              <a:t>NEO_GRB says these LEDs want their color data green first. NEO_KHZ800 is the speed it is clocked out at. Both are correct for the WS2812B parts we use.</a:t>
             </a:r>
           </a:p>
           <a:p>
@@ -35763,7 +35763,7 @@
                 </a:solidFill>
                 <a:latin typeface="Calibri"/>
               </a:rPr>
-              <a:t>4.  Invent a colour with strip.Color(r, g, b). What do you get from (255, 255, 0)? From (128, 0, 128)?</a:t>
+              <a:t>4.  Invent a color with strip.Color(r, g, b). What do you get from (255, 255, 0)? From (128, 0, 128)?</a:t>
             </a:r>
           </a:p>
           <a:p>
@@ -37549,7 +37549,7 @@
                 </a:solidFill>
                 <a:latin typeface="Calibri"/>
               </a:rPr>
-              <a:t>Maths and science you will actually use</a:t>
+              <a:t>Math and science you will actually use</a:t>
             </a:r>
           </a:p>
         </p:txBody>
@@ -38129,7 +38129,7 @@
                 <a:spcPct val="100000"/>
               </a:lnSpc>
               <a:spcAft>
-                <a:spcPts val="200"/>
+                <a:spcPts val="600"/>
               </a:spcAft>
               <a:defRPr sz="1800" b="1">
                 <a:solidFill>
@@ -38145,7 +38145,7 @@
                 </a:solidFill>
                 <a:latin typeface="Calibri"/>
               </a:rPr>
-              <a:t>Maths and science you will actually use (cont.)</a:t>
+              <a:t>Math and science you will actually use (cont.)</a:t>
             </a:r>
           </a:p>
         </p:txBody>
@@ -38218,7 +38218,7 @@
                 </a:solidFill>
                 <a:latin typeface="Calibri"/>
               </a:rPr>
-              <a:t>Wavelength and colour perception, for the lighting</a:t>
+              <a:t>Wavelength and color perception, for the lighting</a:t>
             </a:r>
           </a:p>
           <a:p>
@@ -38309,7 +38309,7 @@
                 </a:solidFill>
                 <a:latin typeface="Calibri"/>
               </a:rPr>
-              <a:t>STEM is not four subjects. It is using maths and science to build something that has to actually work.</a:t>
+              <a:t>STEM is not four subjects. It is using math and science to build something that has to actually work.</a:t>
             </a:r>
           </a:p>
         </p:txBody>

--- a/ground-vehicle/docs/courses/beginner-switch/l1_introduction.pptx
+++ b/ground-vehicle/docs/courses/beginner-switch/l1_introduction.pptx
@@ -27838,7 +27838,7 @@
         <p:spPr>
           <a:xfrm>
             <a:off x="502920" y="1901952"/>
-            <a:ext cx="5387187" cy="4361688"/>
+            <a:ext cx="6249137" cy="4361688"/>
           </a:xfrm>
           <a:prstGeom prst="rect">
             <a:avLst/>
@@ -27856,17 +27856,17 @@
                 <a:spcPct val="100000"/>
               </a:lnSpc>
               <a:spcAft>
-                <a:spcPts val="400"/>
-              </a:spcAft>
-              <a:defRPr sz="1800" b="0">
-                <a:solidFill>
-                  <a:srgbClr val="222222"/>
-                </a:solidFill>
-                <a:latin typeface="Calibri"/>
-              </a:defRPr>
-            </a:pPr>
-            <a:r>
-              <a:rPr sz="1800" b="0">
+                <a:spcPts val="800"/>
+              </a:spcAft>
+              <a:defRPr sz="1900" b="0">
+                <a:solidFill>
+                  <a:srgbClr val="222222"/>
+                </a:solidFill>
+                <a:latin typeface="Calibri"/>
+              </a:defRPr>
+            </a:pPr>
+            <a:r>
+              <a:rPr sz="1900" b="0">
                 <a:solidFill>
                   <a:srgbClr val="222222"/>
                 </a:solidFill>
@@ -27881,17 +27881,17 @@
                 <a:spcPct val="100000"/>
               </a:lnSpc>
               <a:spcAft>
-                <a:spcPts val="400"/>
-              </a:spcAft>
-              <a:defRPr sz="1800" b="0">
-                <a:solidFill>
-                  <a:srgbClr val="222222"/>
-                </a:solidFill>
-                <a:latin typeface="Calibri"/>
-              </a:defRPr>
-            </a:pPr>
-            <a:r>
-              <a:rPr sz="1800" b="0">
+                <a:spcPts val="800"/>
+              </a:spcAft>
+              <a:defRPr sz="1900" b="0">
+                <a:solidFill>
+                  <a:srgbClr val="222222"/>
+                </a:solidFill>
+                <a:latin typeface="Calibri"/>
+              </a:defRPr>
+            </a:pPr>
+            <a:r>
+              <a:rPr sz="1900" b="0">
                 <a:solidFill>
                   <a:srgbClr val="222222"/>
                 </a:solidFill>
@@ -27906,17 +27906,17 @@
                 <a:spcPct val="100000"/>
               </a:lnSpc>
               <a:spcAft>
-                <a:spcPts val="400"/>
-              </a:spcAft>
-              <a:defRPr sz="1800" b="0">
-                <a:solidFill>
-                  <a:srgbClr val="222222"/>
-                </a:solidFill>
-                <a:latin typeface="Calibri"/>
-              </a:defRPr>
-            </a:pPr>
-            <a:r>
-              <a:rPr sz="1800" b="0">
+                <a:spcPts val="800"/>
+              </a:spcAft>
+              <a:defRPr sz="1900" b="0">
+                <a:solidFill>
+                  <a:srgbClr val="222222"/>
+                </a:solidFill>
+                <a:latin typeface="Calibri"/>
+              </a:defRPr>
+            </a:pPr>
+            <a:r>
+              <a:rPr sz="1900" b="0">
                 <a:solidFill>
                   <a:srgbClr val="222222"/>
                 </a:solidFill>
@@ -27931,17 +27931,17 @@
                 <a:spcPct val="100000"/>
               </a:lnSpc>
               <a:spcAft>
-                <a:spcPts val="400"/>
-              </a:spcAft>
-              <a:defRPr sz="1800" b="0">
-                <a:solidFill>
-                  <a:srgbClr val="222222"/>
-                </a:solidFill>
-                <a:latin typeface="Calibri"/>
-              </a:defRPr>
-            </a:pPr>
-            <a:r>
-              <a:rPr sz="1800" b="0">
+                <a:spcPts val="800"/>
+              </a:spcAft>
+              <a:defRPr sz="1900" b="0">
+                <a:solidFill>
+                  <a:srgbClr val="222222"/>
+                </a:solidFill>
+                <a:latin typeface="Calibri"/>
+              </a:defRPr>
+            </a:pPr>
+            <a:r>
+              <a:rPr sz="1900" b="0">
                 <a:solidFill>
                   <a:srgbClr val="222222"/>
                 </a:solidFill>
@@ -27956,33 +27956,33 @@
                 <a:spcPct val="100000"/>
               </a:lnSpc>
               <a:spcAft>
-                <a:spcPts val="400"/>
-              </a:spcAft>
-              <a:defRPr sz="1800" b="0">
-                <a:solidFill>
-                  <a:srgbClr val="222222"/>
-                </a:solidFill>
-                <a:latin typeface="Calibri"/>
-              </a:defRPr>
-            </a:pPr>
-          </a:p>
-          <a:p>
-            <a:pPr algn="l">
-              <a:lnSpc>
-                <a:spcPct val="100000"/>
-              </a:lnSpc>
-              <a:spcAft>
-                <a:spcPts val="400"/>
-              </a:spcAft>
-              <a:defRPr sz="1800" b="0">
-                <a:solidFill>
-                  <a:srgbClr val="222222"/>
-                </a:solidFill>
-                <a:latin typeface="Calibri"/>
-              </a:defRPr>
-            </a:pPr>
-            <a:r>
-              <a:rPr sz="1800" b="0">
+                <a:spcPts val="800"/>
+              </a:spcAft>
+              <a:defRPr sz="1900" b="0">
+                <a:solidFill>
+                  <a:srgbClr val="222222"/>
+                </a:solidFill>
+                <a:latin typeface="Calibri"/>
+              </a:defRPr>
+            </a:pPr>
+          </a:p>
+          <a:p>
+            <a:pPr algn="l">
+              <a:lnSpc>
+                <a:spcPct val="100000"/>
+              </a:lnSpc>
+              <a:spcAft>
+                <a:spcPts val="800"/>
+              </a:spcAft>
+              <a:defRPr sz="1900" b="0">
+                <a:solidFill>
+                  <a:srgbClr val="222222"/>
+                </a:solidFill>
+                <a:latin typeface="Calibri"/>
+              </a:defRPr>
+            </a:pPr>
+            <a:r>
+              <a:rPr sz="1900" b="0">
                 <a:solidFill>
                   <a:srgbClr val="222222"/>
                 </a:solidFill>
@@ -27997,17 +27997,17 @@
                 <a:spcPct val="100000"/>
               </a:lnSpc>
               <a:spcAft>
-                <a:spcPts val="400"/>
-              </a:spcAft>
-              <a:defRPr sz="1800" b="0">
-                <a:solidFill>
-                  <a:srgbClr val="222222"/>
-                </a:solidFill>
-                <a:latin typeface="Calibri"/>
-              </a:defRPr>
-            </a:pPr>
-            <a:r>
-              <a:rPr sz="1800" b="0">
+                <a:spcPts val="800"/>
+              </a:spcAft>
+              <a:defRPr sz="1900" b="0">
+                <a:solidFill>
+                  <a:srgbClr val="222222"/>
+                </a:solidFill>
+                <a:latin typeface="Calibri"/>
+              </a:defRPr>
+            </a:pPr>
+            <a:r>
+              <a:rPr sz="1900" b="0">
                 <a:solidFill>
                   <a:srgbClr val="222222"/>
                 </a:solidFill>
@@ -28022,17 +28022,17 @@
                 <a:spcPct val="100000"/>
               </a:lnSpc>
               <a:spcAft>
-                <a:spcPts val="400"/>
-              </a:spcAft>
-              <a:defRPr sz="1800" b="0">
-                <a:solidFill>
-                  <a:srgbClr val="222222"/>
-                </a:solidFill>
-                <a:latin typeface="Calibri"/>
-              </a:defRPr>
-            </a:pPr>
-            <a:r>
-              <a:rPr sz="1800" b="0">
+                <a:spcPts val="800"/>
+              </a:spcAft>
+              <a:defRPr sz="1900" b="0">
+                <a:solidFill>
+                  <a:srgbClr val="222222"/>
+                </a:solidFill>
+                <a:latin typeface="Calibri"/>
+              </a:defRPr>
+            </a:pPr>
+            <a:r>
+              <a:rPr sz="1900" b="0">
                 <a:solidFill>
                   <a:srgbClr val="222222"/>
                 </a:solidFill>
@@ -28051,8 +28051,8 @@
         </p:nvSpPr>
         <p:spPr>
           <a:xfrm>
-            <a:off x="6301587" y="1901952"/>
-            <a:ext cx="5387187" cy="365760"/>
+            <a:off x="7163537" y="1901952"/>
+            <a:ext cx="4525238" cy="365760"/>
           </a:xfrm>
           <a:prstGeom prst="rect">
             <a:avLst/>
@@ -28099,8 +28099,8 @@
         </p:nvSpPr>
         <p:spPr>
           <a:xfrm>
-            <a:off x="6301587" y="2304288"/>
-            <a:ext cx="5387187" cy="1778508"/>
+            <a:off x="7163537" y="2304288"/>
+            <a:ext cx="4525238" cy="1280854"/>
           </a:xfrm>
           <a:prstGeom prst="rect">
             <a:avLst/>
@@ -28120,15 +28120,15 @@
               <a:spcAft>
                 <a:spcPts val="300"/>
               </a:spcAft>
-              <a:defRPr sz="2200" b="0">
-                <a:solidFill>
-                  <a:srgbClr val="222222"/>
-                </a:solidFill>
-                <a:latin typeface="Calibri"/>
-              </a:defRPr>
-            </a:pPr>
-            <a:r>
-              <a:rPr sz="2200" b="0">
+              <a:defRPr sz="1800" b="0">
+                <a:solidFill>
+                  <a:srgbClr val="222222"/>
+                </a:solidFill>
+                <a:latin typeface="Calibri"/>
+              </a:defRPr>
+            </a:pPr>
+            <a:r>
+              <a:rPr sz="1800" b="0">
                 <a:solidFill>
                   <a:srgbClr val="222222"/>
                 </a:solidFill>
@@ -28145,15 +28145,15 @@
               <a:spcAft>
                 <a:spcPts val="300"/>
               </a:spcAft>
-              <a:defRPr sz="2200" b="0">
-                <a:solidFill>
-                  <a:srgbClr val="222222"/>
-                </a:solidFill>
-                <a:latin typeface="Calibri"/>
-              </a:defRPr>
-            </a:pPr>
-            <a:r>
-              <a:rPr sz="2200" b="0">
+              <a:defRPr sz="1800" b="0">
+                <a:solidFill>
+                  <a:srgbClr val="222222"/>
+                </a:solidFill>
+                <a:latin typeface="Calibri"/>
+              </a:defRPr>
+            </a:pPr>
+            <a:r>
+              <a:rPr sz="1800" b="0">
                 <a:solidFill>
                   <a:srgbClr val="222222"/>
                 </a:solidFill>
@@ -28172,8 +28172,8 @@
         </p:nvSpPr>
         <p:spPr>
           <a:xfrm>
-            <a:off x="6301587" y="4119372"/>
-            <a:ext cx="5387187" cy="365760"/>
+            <a:off x="7163537" y="3658294"/>
+            <a:ext cx="4525238" cy="365760"/>
           </a:xfrm>
           <a:prstGeom prst="rect">
             <a:avLst/>
@@ -28220,8 +28220,8 @@
         </p:nvSpPr>
         <p:spPr>
           <a:xfrm>
-            <a:off x="6301587" y="4521708"/>
-            <a:ext cx="5387187" cy="1778508"/>
+            <a:off x="7163537" y="4060630"/>
+            <a:ext cx="4525238" cy="2203009"/>
           </a:xfrm>
           <a:prstGeom prst="rect">
             <a:avLst/>
@@ -28239,7 +28239,7 @@
                 <a:spcPct val="100000"/>
               </a:lnSpc>
               <a:spcAft>
-                <a:spcPts val="200"/>
+                <a:spcPts val="300"/>
               </a:spcAft>
               <a:defRPr sz="1800" b="0">
                 <a:solidFill>
@@ -28264,7 +28264,7 @@
                 <a:spcPct val="100000"/>
               </a:lnSpc>
               <a:spcAft>
-                <a:spcPts val="200"/>
+                <a:spcPts val="300"/>
               </a:spcAft>
               <a:defRPr sz="1800" b="0">
                 <a:solidFill>
@@ -28289,7 +28289,7 @@
                 <a:spcPct val="100000"/>
               </a:lnSpc>
               <a:spcAft>
-                <a:spcPts val="200"/>
+                <a:spcPts val="300"/>
               </a:spcAft>
               <a:defRPr sz="1800" b="0">
                 <a:solidFill>
@@ -32219,7 +32219,7 @@
         <p:spPr>
           <a:xfrm>
             <a:off x="502920" y="1901952"/>
-            <a:ext cx="5387187" cy="4361688"/>
+            <a:ext cx="6249137" cy="4361688"/>
           </a:xfrm>
           <a:prstGeom prst="rect">
             <a:avLst/>
@@ -32239,15 +32239,15 @@
               <a:spcAft>
                 <a:spcPts val="800"/>
               </a:spcAft>
-              <a:defRPr sz="1900" b="0">
-                <a:solidFill>
-                  <a:srgbClr val="222222"/>
-                </a:solidFill>
-                <a:latin typeface="Calibri"/>
-              </a:defRPr>
-            </a:pPr>
-            <a:r>
-              <a:rPr sz="1900" b="0">
+              <a:defRPr sz="2000" b="0">
+                <a:solidFill>
+                  <a:srgbClr val="222222"/>
+                </a:solidFill>
+                <a:latin typeface="Calibri"/>
+              </a:defRPr>
+            </a:pPr>
+            <a:r>
+              <a:rPr sz="2000" b="0">
                 <a:solidFill>
                   <a:srgbClr val="222222"/>
                 </a:solidFill>
@@ -32264,15 +32264,15 @@
               <a:spcAft>
                 <a:spcPts val="800"/>
               </a:spcAft>
-              <a:defRPr sz="1900" b="0">
-                <a:solidFill>
-                  <a:srgbClr val="222222"/>
-                </a:solidFill>
-                <a:latin typeface="Calibri"/>
-              </a:defRPr>
-            </a:pPr>
-            <a:r>
-              <a:rPr sz="1900" b="0">
+              <a:defRPr sz="2000" b="0">
+                <a:solidFill>
+                  <a:srgbClr val="222222"/>
+                </a:solidFill>
+                <a:latin typeface="Calibri"/>
+              </a:defRPr>
+            </a:pPr>
+            <a:r>
+              <a:rPr sz="2000" b="0">
                 <a:solidFill>
                   <a:srgbClr val="222222"/>
                 </a:solidFill>
@@ -32289,15 +32289,15 @@
               <a:spcAft>
                 <a:spcPts val="800"/>
               </a:spcAft>
-              <a:defRPr sz="1900" b="0">
-                <a:solidFill>
-                  <a:srgbClr val="222222"/>
-                </a:solidFill>
-                <a:latin typeface="Calibri"/>
-              </a:defRPr>
-            </a:pPr>
-            <a:r>
-              <a:rPr sz="1900" b="0">
+              <a:defRPr sz="2000" b="0">
+                <a:solidFill>
+                  <a:srgbClr val="222222"/>
+                </a:solidFill>
+                <a:latin typeface="Calibri"/>
+              </a:defRPr>
+            </a:pPr>
+            <a:r>
+              <a:rPr sz="2000" b="0">
                 <a:solidFill>
                   <a:srgbClr val="222222"/>
                 </a:solidFill>
@@ -32314,15 +32314,15 @@
               <a:spcAft>
                 <a:spcPts val="800"/>
               </a:spcAft>
-              <a:defRPr sz="1900" b="0">
-                <a:solidFill>
-                  <a:srgbClr val="222222"/>
-                </a:solidFill>
-                <a:latin typeface="Calibri"/>
-              </a:defRPr>
-            </a:pPr>
-            <a:r>
-              <a:rPr sz="1900" b="0">
+              <a:defRPr sz="2000" b="0">
+                <a:solidFill>
+                  <a:srgbClr val="222222"/>
+                </a:solidFill>
+                <a:latin typeface="Calibri"/>
+              </a:defRPr>
+            </a:pPr>
+            <a:r>
+              <a:rPr sz="2000" b="0">
                 <a:solidFill>
                   <a:srgbClr val="222222"/>
                 </a:solidFill>
@@ -32339,15 +32339,15 @@
               <a:spcAft>
                 <a:spcPts val="800"/>
               </a:spcAft>
-              <a:defRPr sz="1900" b="0">
-                <a:solidFill>
-                  <a:srgbClr val="222222"/>
-                </a:solidFill>
-                <a:latin typeface="Calibri"/>
-              </a:defRPr>
-            </a:pPr>
-            <a:r>
-              <a:rPr sz="1900" b="0">
+              <a:defRPr sz="2000" b="0">
+                <a:solidFill>
+                  <a:srgbClr val="222222"/>
+                </a:solidFill>
+                <a:latin typeface="Calibri"/>
+              </a:defRPr>
+            </a:pPr>
+            <a:r>
+              <a:rPr sz="2000" b="0">
                 <a:solidFill>
                   <a:srgbClr val="222222"/>
                 </a:solidFill>
@@ -32364,15 +32364,15 @@
               <a:spcAft>
                 <a:spcPts val="800"/>
               </a:spcAft>
-              <a:defRPr sz="1900" b="0">
-                <a:solidFill>
-                  <a:srgbClr val="222222"/>
-                </a:solidFill>
-                <a:latin typeface="Calibri"/>
-              </a:defRPr>
-            </a:pPr>
-            <a:r>
-              <a:rPr sz="1900" b="0">
+              <a:defRPr sz="2000" b="0">
+                <a:solidFill>
+                  <a:srgbClr val="222222"/>
+                </a:solidFill>
+                <a:latin typeface="Calibri"/>
+              </a:defRPr>
+            </a:pPr>
+            <a:r>
+              <a:rPr sz="2000" b="0">
                 <a:solidFill>
                   <a:srgbClr val="222222"/>
                 </a:solidFill>
@@ -32391,8 +32391,8 @@
         </p:nvSpPr>
         <p:spPr>
           <a:xfrm>
-            <a:off x="6301587" y="1901952"/>
-            <a:ext cx="5387187" cy="365760"/>
+            <a:off x="7163537" y="1901952"/>
+            <a:ext cx="4525238" cy="365760"/>
           </a:xfrm>
           <a:prstGeom prst="rect">
             <a:avLst/>
@@ -32439,8 +32439,8 @@
         </p:nvSpPr>
         <p:spPr>
           <a:xfrm>
-            <a:off x="6301587" y="2304288"/>
-            <a:ext cx="5387187" cy="1778508"/>
+            <a:off x="7163537" y="2304288"/>
+            <a:ext cx="4525238" cy="1161288"/>
           </a:xfrm>
           <a:prstGeom prst="rect">
             <a:avLst/>
@@ -32458,17 +32458,17 @@
                 <a:spcPct val="100000"/>
               </a:lnSpc>
               <a:spcAft>
-                <a:spcPts val="600"/>
-              </a:spcAft>
-              <a:defRPr sz="3000" b="0">
-                <a:solidFill>
-                  <a:srgbClr val="222222"/>
-                </a:solidFill>
-                <a:latin typeface="Calibri"/>
-              </a:defRPr>
-            </a:pPr>
-            <a:r>
-              <a:rPr sz="3000" b="0">
+                <a:spcPts val="300"/>
+              </a:spcAft>
+              <a:defRPr sz="2200" b="0">
+                <a:solidFill>
+                  <a:srgbClr val="222222"/>
+                </a:solidFill>
+                <a:latin typeface="Calibri"/>
+              </a:defRPr>
+            </a:pPr>
+            <a:r>
+              <a:rPr sz="2200" b="0">
                 <a:solidFill>
                   <a:srgbClr val="222222"/>
                 </a:solidFill>
@@ -32487,8 +32487,8 @@
         </p:nvSpPr>
         <p:spPr>
           <a:xfrm>
-            <a:off x="6301587" y="4119372"/>
-            <a:ext cx="5387187" cy="365760"/>
+            <a:off x="7163537" y="3538728"/>
+            <a:ext cx="4525238" cy="365760"/>
           </a:xfrm>
           <a:prstGeom prst="rect">
             <a:avLst/>
@@ -32535,8 +32535,8 @@
         </p:nvSpPr>
         <p:spPr>
           <a:xfrm>
-            <a:off x="6301587" y="4521708"/>
-            <a:ext cx="5387187" cy="1778508"/>
+            <a:off x="7163537" y="3941064"/>
+            <a:ext cx="4525238" cy="2322576"/>
           </a:xfrm>
           <a:prstGeom prst="rect">
             <a:avLst/>
@@ -32556,15 +32556,15 @@
               <a:spcAft>
                 <a:spcPts val="300"/>
               </a:spcAft>
-              <a:defRPr sz="2600" b="0">
-                <a:solidFill>
-                  <a:srgbClr val="222222"/>
-                </a:solidFill>
-                <a:latin typeface="Calibri"/>
-              </a:defRPr>
-            </a:pPr>
-            <a:r>
-              <a:rPr sz="2600" b="0">
+              <a:defRPr sz="2700" b="0">
+                <a:solidFill>
+                  <a:srgbClr val="222222"/>
+                </a:solidFill>
+                <a:latin typeface="Calibri"/>
+              </a:defRPr>
+            </a:pPr>
+            <a:r>
+              <a:rPr sz="2700" b="0">
                 <a:solidFill>
                   <a:srgbClr val="222222"/>
                 </a:solidFill>
@@ -32581,15 +32581,15 @@
               <a:spcAft>
                 <a:spcPts val="300"/>
               </a:spcAft>
-              <a:defRPr sz="2600" b="0">
-                <a:solidFill>
-                  <a:srgbClr val="222222"/>
-                </a:solidFill>
-                <a:latin typeface="Calibri"/>
-              </a:defRPr>
-            </a:pPr>
-            <a:r>
-              <a:rPr sz="2600" b="0">
+              <a:defRPr sz="2700" b="0">
+                <a:solidFill>
+                  <a:srgbClr val="222222"/>
+                </a:solidFill>
+                <a:latin typeface="Calibri"/>
+              </a:defRPr>
+            </a:pPr>
+            <a:r>
+              <a:rPr sz="2700" b="0">
                 <a:solidFill>
                   <a:srgbClr val="222222"/>
                 </a:solidFill>
@@ -35252,7 +35252,7 @@
         <p:spPr>
           <a:xfrm>
             <a:off x="502920" y="1901952"/>
-            <a:ext cx="5387187" cy="4361688"/>
+            <a:ext cx="6249137" cy="4361688"/>
           </a:xfrm>
           <a:prstGeom prst="rect">
             <a:avLst/>
@@ -35399,8 +35399,8 @@
         </p:nvSpPr>
         <p:spPr>
           <a:xfrm>
-            <a:off x="6301587" y="1901952"/>
-            <a:ext cx="5387187" cy="365760"/>
+            <a:off x="7163537" y="1901952"/>
+            <a:ext cx="4525238" cy="365760"/>
           </a:xfrm>
           <a:prstGeom prst="rect">
             <a:avLst/>
@@ -35447,8 +35447,8 @@
         </p:nvSpPr>
         <p:spPr>
           <a:xfrm>
-            <a:off x="6301587" y="2304288"/>
-            <a:ext cx="5387187" cy="1778508"/>
+            <a:off x="7163537" y="2304288"/>
+            <a:ext cx="4525238" cy="1161288"/>
           </a:xfrm>
           <a:prstGeom prst="rect">
             <a:avLst/>
@@ -35495,8 +35495,8 @@
         </p:nvSpPr>
         <p:spPr>
           <a:xfrm>
-            <a:off x="6301587" y="4119372"/>
-            <a:ext cx="5387187" cy="365760"/>
+            <a:off x="7163537" y="3538728"/>
+            <a:ext cx="4525238" cy="365760"/>
           </a:xfrm>
           <a:prstGeom prst="rect">
             <a:avLst/>
@@ -35543,8 +35543,8 @@
         </p:nvSpPr>
         <p:spPr>
           <a:xfrm>
-            <a:off x="6301587" y="4521708"/>
-            <a:ext cx="5387187" cy="1778508"/>
+            <a:off x="7163537" y="3941064"/>
+            <a:ext cx="4525238" cy="2322576"/>
           </a:xfrm>
           <a:prstGeom prst="rect">
             <a:avLst/>
@@ -35562,17 +35562,17 @@
                 <a:spcPct val="100000"/>
               </a:lnSpc>
               <a:spcAft>
-                <a:spcPts val="300"/>
-              </a:spcAft>
-              <a:defRPr sz="2600" b="0">
-                <a:solidFill>
-                  <a:srgbClr val="222222"/>
-                </a:solidFill>
-                <a:latin typeface="Calibri"/>
-              </a:defRPr>
-            </a:pPr>
-            <a:r>
-              <a:rPr sz="2600" b="0">
+                <a:spcPts val="600"/>
+              </a:spcAft>
+              <a:defRPr sz="2900" b="0">
+                <a:solidFill>
+                  <a:srgbClr val="222222"/>
+                </a:solidFill>
+                <a:latin typeface="Calibri"/>
+              </a:defRPr>
+            </a:pPr>
+            <a:r>
+              <a:rPr sz="2900" b="0">
                 <a:solidFill>
                   <a:srgbClr val="222222"/>
                 </a:solidFill>
@@ -35587,17 +35587,17 @@
                 <a:spcPct val="100000"/>
               </a:lnSpc>
               <a:spcAft>
-                <a:spcPts val="300"/>
-              </a:spcAft>
-              <a:defRPr sz="2600" b="0">
-                <a:solidFill>
-                  <a:srgbClr val="222222"/>
-                </a:solidFill>
-                <a:latin typeface="Calibri"/>
-              </a:defRPr>
-            </a:pPr>
-            <a:r>
-              <a:rPr sz="2600" b="0">
+                <a:spcPts val="600"/>
+              </a:spcAft>
+              <a:defRPr sz="2900" b="0">
+                <a:solidFill>
+                  <a:srgbClr val="222222"/>
+                </a:solidFill>
+                <a:latin typeface="Calibri"/>
+              </a:defRPr>
+            </a:pPr>
+            <a:r>
+              <a:rPr sz="2900" b="0">
                 <a:solidFill>
                   <a:srgbClr val="222222"/>
                 </a:solidFill>

--- a/ground-vehicle/docs/courses/beginner-switch/l1_introduction.pptx
+++ b/ground-vehicle/docs/courses/beginner-switch/l1_introduction.pptx
@@ -8438,6 +8438,22 @@
               <a:spcAft>
                 <a:spcPts val="100"/>
               </a:spcAft>
+              <a:defRPr sz="600" b="0">
+                <a:solidFill>
+                  <a:srgbClr val="666666"/>
+                </a:solidFill>
+                <a:latin typeface="Calibri"/>
+              </a:defRPr>
+            </a:pPr>
+          </a:p>
+          <a:p>
+            <a:pPr algn="l">
+              <a:lnSpc>
+                <a:spcPct val="100000"/>
+              </a:lnSpc>
+              <a:spcAft>
+                <a:spcPts val="100"/>
+              </a:spcAft>
               <a:defRPr sz="1200" b="0">
                 <a:solidFill>
                   <a:srgbClr val="666666"/>
@@ -8445,6 +8461,15 @@
                 <a:latin typeface="Calibri"/>
               </a:defRPr>
             </a:pPr>
+            <a:r>
+              <a:rPr sz="1200" b="0">
+                <a:solidFill>
+                  <a:srgbClr val="666666"/>
+                </a:solidFill>
+                <a:latin typeface="Calibri"/>
+              </a:rPr>
+              <a:t>Kevin Bowen, President  -  kbowen6@icloud.com</a:t>
+            </a:r>
           </a:p>
           <a:p>
             <a:pPr algn="l">
@@ -8468,7 +8493,7 @@
                 </a:solidFill>
                 <a:latin typeface="Calibri"/>
               </a:rPr>
-              <a:t>Kevin Bowen, President  -  kbowen6@icloud.com</a:t>
+              <a:t>Malcom Graham, VP Education      Louis Parker, VP Technology</a:t>
             </a:r>
           </a:p>
           <a:p>
@@ -8493,7 +8518,7 @@
                 </a:solidFill>
                 <a:latin typeface="Calibri"/>
               </a:rPr>
-              <a:t>Malcom Graham, VP Education      Louis Parker, VP Technology</a:t>
+              <a:t>Valen Farre, System Engineer      Gary Howland, Animation</a:t>
             </a:r>
           </a:p>
           <a:p>
@@ -8518,7 +8543,7 @@
                 </a:solidFill>
                 <a:latin typeface="Calibri"/>
               </a:rPr>
-              <a:t>Valen Farre, System Engineer      Gary Howland, Animation</a:t>
+              <a:t>Eddie Revollo, Artificial Intelligence</a:t>
             </a:r>
           </a:p>
           <a:p>
@@ -8543,7 +8568,7 @@
                 </a:solidFill>
                 <a:latin typeface="Calibri"/>
               </a:rPr>
-              <a:t>Eddie Revollo, Artificial Intelligence</a:t>
+              <a:t>Interns: Oscar Canazales, Krishnansh Vemulapalli, Soham Gangal, Erik Olsen</a:t>
             </a:r>
           </a:p>
           <a:p>
@@ -8554,32 +8579,7 @@
               <a:spcAft>
                 <a:spcPts val="100"/>
               </a:spcAft>
-              <a:defRPr sz="1200" b="0">
-                <a:solidFill>
-                  <a:srgbClr val="666666"/>
-                </a:solidFill>
-                <a:latin typeface="Calibri"/>
-              </a:defRPr>
-            </a:pPr>
-            <a:r>
-              <a:rPr sz="1200" b="0">
-                <a:solidFill>
-                  <a:srgbClr val="666666"/>
-                </a:solidFill>
-                <a:latin typeface="Calibri"/>
-              </a:rPr>
-              <a:t>Interns: Oscar Canazales, Krishnansh Vemulapalli, Soham Gangal, Erik Olsen</a:t>
-            </a:r>
-          </a:p>
-          <a:p>
-            <a:pPr algn="l">
-              <a:lnSpc>
-                <a:spcPct val="100000"/>
-              </a:lnSpc>
-              <a:spcAft>
-                <a:spcPts val="100"/>
-              </a:spcAft>
-              <a:defRPr sz="1200" b="0">
+              <a:defRPr sz="600" b="0">
                 <a:solidFill>
                   <a:srgbClr val="666666"/>
                 </a:solidFill>
@@ -17224,7 +17224,7 @@
               <a:spcAft>
                 <a:spcPts val="600"/>
               </a:spcAft>
-              <a:defRPr sz="2100" b="0">
+              <a:defRPr sz="1050" b="0">
                 <a:solidFill>
                   <a:srgbClr val="222222"/>
                 </a:solidFill>
@@ -18220,15 +18220,15 @@
               <a:spcAft>
                 <a:spcPts val="600"/>
               </a:spcAft>
-              <a:defRPr sz="1900" b="0">
-                <a:solidFill>
-                  <a:srgbClr val="222222"/>
-                </a:solidFill>
-                <a:latin typeface="Calibri"/>
-              </a:defRPr>
-            </a:pPr>
-            <a:r>
-              <a:rPr sz="1900" b="0">
+              <a:defRPr sz="2100" b="0">
+                <a:solidFill>
+                  <a:srgbClr val="222222"/>
+                </a:solidFill>
+                <a:latin typeface="Calibri"/>
+              </a:defRPr>
+            </a:pPr>
+            <a:r>
+              <a:rPr sz="2100" b="0">
                 <a:solidFill>
                   <a:srgbClr val="222222"/>
                 </a:solidFill>
@@ -18245,15 +18245,15 @@
               <a:spcAft>
                 <a:spcPts val="600"/>
               </a:spcAft>
-              <a:defRPr sz="1900" b="0">
-                <a:solidFill>
-                  <a:srgbClr val="222222"/>
-                </a:solidFill>
-                <a:latin typeface="Calibri"/>
-              </a:defRPr>
-            </a:pPr>
-            <a:r>
-              <a:rPr sz="1900" b="0">
+              <a:defRPr sz="2100" b="0">
+                <a:solidFill>
+                  <a:srgbClr val="222222"/>
+                </a:solidFill>
+                <a:latin typeface="Calibri"/>
+              </a:defRPr>
+            </a:pPr>
+            <a:r>
+              <a:rPr sz="2100" b="0">
                 <a:solidFill>
                   <a:srgbClr val="222222"/>
                 </a:solidFill>
@@ -18270,7 +18270,7 @@
               <a:spcAft>
                 <a:spcPts val="600"/>
               </a:spcAft>
-              <a:defRPr sz="1900" b="0">
+              <a:defRPr sz="1050" b="0">
                 <a:solidFill>
                   <a:srgbClr val="222222"/>
                 </a:solidFill>
@@ -18286,15 +18286,15 @@
               <a:spcAft>
                 <a:spcPts val="600"/>
               </a:spcAft>
-              <a:defRPr sz="1900" b="0">
-                <a:solidFill>
-                  <a:srgbClr val="222222"/>
-                </a:solidFill>
-                <a:latin typeface="Calibri"/>
-              </a:defRPr>
-            </a:pPr>
-            <a:r>
-              <a:rPr sz="1900" b="0">
+              <a:defRPr sz="2100" b="0">
+                <a:solidFill>
+                  <a:srgbClr val="222222"/>
+                </a:solidFill>
+                <a:latin typeface="Calibri"/>
+              </a:defRPr>
+            </a:pPr>
+            <a:r>
+              <a:rPr sz="2100" b="0">
                 <a:solidFill>
                   <a:srgbClr val="222222"/>
                 </a:solidFill>
@@ -18311,15 +18311,15 @@
               <a:spcAft>
                 <a:spcPts val="600"/>
               </a:spcAft>
-              <a:defRPr sz="1900" b="0">
-                <a:solidFill>
-                  <a:srgbClr val="222222"/>
-                </a:solidFill>
-                <a:latin typeface="Calibri"/>
-              </a:defRPr>
-            </a:pPr>
-            <a:r>
-              <a:rPr sz="1900" b="0">
+              <a:defRPr sz="2100" b="0">
+                <a:solidFill>
+                  <a:srgbClr val="222222"/>
+                </a:solidFill>
+                <a:latin typeface="Calibri"/>
+              </a:defRPr>
+            </a:pPr>
+            <a:r>
+              <a:rPr sz="2100" b="0">
                 <a:solidFill>
                   <a:srgbClr val="222222"/>
                 </a:solidFill>
@@ -18336,15 +18336,15 @@
               <a:spcAft>
                 <a:spcPts val="600"/>
               </a:spcAft>
-              <a:defRPr sz="1900" b="0">
-                <a:solidFill>
-                  <a:srgbClr val="222222"/>
-                </a:solidFill>
-                <a:latin typeface="Calibri"/>
-              </a:defRPr>
-            </a:pPr>
-            <a:r>
-              <a:rPr sz="1900" b="0">
+              <a:defRPr sz="2100" b="0">
+                <a:solidFill>
+                  <a:srgbClr val="222222"/>
+                </a:solidFill>
+                <a:latin typeface="Calibri"/>
+              </a:defRPr>
+            </a:pPr>
+            <a:r>
+              <a:rPr sz="2100" b="0">
                 <a:solidFill>
                   <a:srgbClr val="222222"/>
                 </a:solidFill>
@@ -18361,7 +18361,7 @@
               <a:spcAft>
                 <a:spcPts val="600"/>
               </a:spcAft>
-              <a:defRPr sz="1900" b="0">
+              <a:defRPr sz="1050" b="0">
                 <a:solidFill>
                   <a:srgbClr val="222222"/>
                 </a:solidFill>
@@ -18377,15 +18377,15 @@
               <a:spcAft>
                 <a:spcPts val="600"/>
               </a:spcAft>
-              <a:defRPr sz="1900" b="0">
-                <a:solidFill>
-                  <a:srgbClr val="222222"/>
-                </a:solidFill>
-                <a:latin typeface="Calibri"/>
-              </a:defRPr>
-            </a:pPr>
-            <a:r>
-              <a:rPr sz="1900" b="0">
+              <a:defRPr sz="2100" b="0">
+                <a:solidFill>
+                  <a:srgbClr val="222222"/>
+                </a:solidFill>
+                <a:latin typeface="Calibri"/>
+              </a:defRPr>
+            </a:pPr>
+            <a:r>
+              <a:rPr sz="2100" b="0">
                 <a:solidFill>
                   <a:srgbClr val="222222"/>
                 </a:solidFill>
@@ -18693,17 +18693,17 @@
                 <a:spcPct val="100000"/>
               </a:lnSpc>
               <a:spcAft>
-                <a:spcPts val="600"/>
-              </a:spcAft>
-              <a:defRPr sz="2700" b="0">
-                <a:solidFill>
-                  <a:srgbClr val="222222"/>
-                </a:solidFill>
-                <a:latin typeface="Calibri"/>
-              </a:defRPr>
-            </a:pPr>
-            <a:r>
-              <a:rPr sz="2700" b="0">
+                <a:spcPts val="900"/>
+              </a:spcAft>
+              <a:defRPr sz="2900" b="0">
+                <a:solidFill>
+                  <a:srgbClr val="222222"/>
+                </a:solidFill>
+                <a:latin typeface="Calibri"/>
+              </a:defRPr>
+            </a:pPr>
+            <a:r>
+              <a:rPr sz="2900" b="0">
                 <a:solidFill>
                   <a:srgbClr val="222222"/>
                 </a:solidFill>
@@ -18718,33 +18718,33 @@
                 <a:spcPct val="100000"/>
               </a:lnSpc>
               <a:spcAft>
-                <a:spcPts val="600"/>
-              </a:spcAft>
-              <a:defRPr sz="2700" b="0">
-                <a:solidFill>
-                  <a:srgbClr val="222222"/>
-                </a:solidFill>
-                <a:latin typeface="Calibri"/>
-              </a:defRPr>
-            </a:pPr>
-          </a:p>
-          <a:p>
-            <a:pPr algn="l">
-              <a:lnSpc>
-                <a:spcPct val="100000"/>
-              </a:lnSpc>
-              <a:spcAft>
-                <a:spcPts val="600"/>
-              </a:spcAft>
-              <a:defRPr sz="2700" b="0">
-                <a:solidFill>
-                  <a:srgbClr val="222222"/>
-                </a:solidFill>
-                <a:latin typeface="Calibri"/>
-              </a:defRPr>
-            </a:pPr>
-            <a:r>
-              <a:rPr sz="2700" b="0">
+                <a:spcPts val="900"/>
+              </a:spcAft>
+              <a:defRPr sz="1450" b="0">
+                <a:solidFill>
+                  <a:srgbClr val="222222"/>
+                </a:solidFill>
+                <a:latin typeface="Calibri"/>
+              </a:defRPr>
+            </a:pPr>
+          </a:p>
+          <a:p>
+            <a:pPr algn="l">
+              <a:lnSpc>
+                <a:spcPct val="100000"/>
+              </a:lnSpc>
+              <a:spcAft>
+                <a:spcPts val="900"/>
+              </a:spcAft>
+              <a:defRPr sz="2900" b="0">
+                <a:solidFill>
+                  <a:srgbClr val="222222"/>
+                </a:solidFill>
+                <a:latin typeface="Calibri"/>
+              </a:defRPr>
+            </a:pPr>
+            <a:r>
+              <a:rPr sz="2900" b="0">
                 <a:solidFill>
                   <a:srgbClr val="222222"/>
                 </a:solidFill>
@@ -18759,17 +18759,17 @@
                 <a:spcPct val="100000"/>
               </a:lnSpc>
               <a:spcAft>
-                <a:spcPts val="600"/>
-              </a:spcAft>
-              <a:defRPr sz="2700" b="0">
-                <a:solidFill>
-                  <a:srgbClr val="222222"/>
-                </a:solidFill>
-                <a:latin typeface="Calibri"/>
-              </a:defRPr>
-            </a:pPr>
-            <a:r>
-              <a:rPr sz="2700" b="0">
+                <a:spcPts val="900"/>
+              </a:spcAft>
+              <a:defRPr sz="2900" b="0">
+                <a:solidFill>
+                  <a:srgbClr val="222222"/>
+                </a:solidFill>
+                <a:latin typeface="Calibri"/>
+              </a:defRPr>
+            </a:pPr>
+            <a:r>
+              <a:rPr sz="2900" b="0">
                 <a:solidFill>
                   <a:srgbClr val="222222"/>
                 </a:solidFill>
@@ -18784,33 +18784,33 @@
                 <a:spcPct val="100000"/>
               </a:lnSpc>
               <a:spcAft>
-                <a:spcPts val="600"/>
-              </a:spcAft>
-              <a:defRPr sz="2700" b="0">
-                <a:solidFill>
-                  <a:srgbClr val="222222"/>
-                </a:solidFill>
-                <a:latin typeface="Calibri"/>
-              </a:defRPr>
-            </a:pPr>
-          </a:p>
-          <a:p>
-            <a:pPr algn="l">
-              <a:lnSpc>
-                <a:spcPct val="100000"/>
-              </a:lnSpc>
-              <a:spcAft>
-                <a:spcPts val="600"/>
-              </a:spcAft>
-              <a:defRPr sz="2700" b="0">
-                <a:solidFill>
-                  <a:srgbClr val="222222"/>
-                </a:solidFill>
-                <a:latin typeface="Calibri"/>
-              </a:defRPr>
-            </a:pPr>
-            <a:r>
-              <a:rPr sz="2700" b="0">
+                <a:spcPts val="900"/>
+              </a:spcAft>
+              <a:defRPr sz="1450" b="0">
+                <a:solidFill>
+                  <a:srgbClr val="222222"/>
+                </a:solidFill>
+                <a:latin typeface="Calibri"/>
+              </a:defRPr>
+            </a:pPr>
+          </a:p>
+          <a:p>
+            <a:pPr algn="l">
+              <a:lnSpc>
+                <a:spcPct val="100000"/>
+              </a:lnSpc>
+              <a:spcAft>
+                <a:spcPts val="900"/>
+              </a:spcAft>
+              <a:defRPr sz="2900" b="0">
+                <a:solidFill>
+                  <a:srgbClr val="222222"/>
+                </a:solidFill>
+                <a:latin typeface="Calibri"/>
+              </a:defRPr>
+            </a:pPr>
+            <a:r>
+              <a:rPr sz="2900" b="0">
                 <a:solidFill>
                   <a:srgbClr val="222222"/>
                 </a:solidFill>
@@ -20377,7 +20377,7 @@
         <p:spPr>
           <a:xfrm>
             <a:off x="502920" y="1755648"/>
-            <a:ext cx="5364327" cy="3419856"/>
+            <a:ext cx="11185855" cy="3419856"/>
           </a:xfrm>
           <a:prstGeom prst="rect">
             <a:avLst/>
@@ -20395,17 +20395,17 @@
                 <a:spcPct val="100000"/>
               </a:lnSpc>
               <a:spcAft>
-                <a:spcPts val="900"/>
-              </a:spcAft>
-              <a:defRPr sz="2200" b="0">
-                <a:solidFill>
-                  <a:srgbClr val="222222"/>
-                </a:solidFill>
-                <a:latin typeface="Calibri"/>
-              </a:defRPr>
-            </a:pPr>
-            <a:r>
-              <a:rPr sz="2200" b="0">
+                <a:spcPts val="600"/>
+              </a:spcAft>
+              <a:defRPr sz="1900" b="0">
+                <a:solidFill>
+                  <a:srgbClr val="222222"/>
+                </a:solidFill>
+                <a:latin typeface="Calibri"/>
+              </a:defRPr>
+            </a:pPr>
+            <a:r>
+              <a:rPr sz="1900" b="0">
                 <a:solidFill>
                   <a:srgbClr val="222222"/>
                 </a:solidFill>
@@ -20420,33 +20420,33 @@
                 <a:spcPct val="100000"/>
               </a:lnSpc>
               <a:spcAft>
-                <a:spcPts val="900"/>
-              </a:spcAft>
-              <a:defRPr sz="2200" b="0">
-                <a:solidFill>
-                  <a:srgbClr val="222222"/>
-                </a:solidFill>
-                <a:latin typeface="Calibri"/>
-              </a:defRPr>
-            </a:pPr>
-          </a:p>
-          <a:p>
-            <a:pPr algn="l">
-              <a:lnSpc>
-                <a:spcPct val="100000"/>
-              </a:lnSpc>
-              <a:spcAft>
-                <a:spcPts val="900"/>
-              </a:spcAft>
-              <a:defRPr sz="2200" b="0">
-                <a:solidFill>
-                  <a:srgbClr val="222222"/>
-                </a:solidFill>
-                <a:latin typeface="Calibri"/>
-              </a:defRPr>
-            </a:pPr>
-            <a:r>
-              <a:rPr sz="2200" b="0">
+                <a:spcPts val="600"/>
+              </a:spcAft>
+              <a:defRPr sz="950" b="0">
+                <a:solidFill>
+                  <a:srgbClr val="222222"/>
+                </a:solidFill>
+                <a:latin typeface="Calibri"/>
+              </a:defRPr>
+            </a:pPr>
+          </a:p>
+          <a:p>
+            <a:pPr algn="l">
+              <a:lnSpc>
+                <a:spcPct val="100000"/>
+              </a:lnSpc>
+              <a:spcAft>
+                <a:spcPts val="600"/>
+              </a:spcAft>
+              <a:defRPr sz="1900" b="0">
+                <a:solidFill>
+                  <a:srgbClr val="222222"/>
+                </a:solidFill>
+                <a:latin typeface="Calibri"/>
+              </a:defRPr>
+            </a:pPr>
+            <a:r>
+              <a:rPr sz="1900" b="0">
                 <a:solidFill>
                   <a:srgbClr val="222222"/>
                 </a:solidFill>
@@ -20461,17 +20461,17 @@
                 <a:spcPct val="100000"/>
               </a:lnSpc>
               <a:spcAft>
-                <a:spcPts val="900"/>
-              </a:spcAft>
-              <a:defRPr sz="2200" b="0">
-                <a:solidFill>
-                  <a:srgbClr val="222222"/>
-                </a:solidFill>
-                <a:latin typeface="Calibri"/>
-              </a:defRPr>
-            </a:pPr>
-            <a:r>
-              <a:rPr sz="2200" b="0">
+                <a:spcPts val="600"/>
+              </a:spcAft>
+              <a:defRPr sz="1900" b="0">
+                <a:solidFill>
+                  <a:srgbClr val="222222"/>
+                </a:solidFill>
+                <a:latin typeface="Calibri"/>
+              </a:defRPr>
+            </a:pPr>
+            <a:r>
+              <a:rPr sz="1900" b="0">
                 <a:solidFill>
                   <a:srgbClr val="222222"/>
                 </a:solidFill>
@@ -20480,46 +20480,23 @@
               <a:t>Documents\\Arduino\\</a:t>
             </a:r>
           </a:p>
-        </p:txBody>
-      </p:sp>
-      <p:sp>
-        <p:nvSpPr>
-          <p:cNvPr id="8" name="TextBox 7"/>
-          <p:cNvSpPr txBox="1"/>
-          <p:nvPr/>
-        </p:nvSpPr>
-        <p:spPr>
-          <a:xfrm>
-            <a:off x="6324447" y="1755648"/>
-            <a:ext cx="5364327" cy="3419856"/>
-          </a:xfrm>
-          <a:prstGeom prst="rect">
-            <a:avLst/>
-          </a:prstGeom>
-          <a:noFill/>
-        </p:spPr>
-        <p:txBody>
-          <a:bodyPr wrap="square" lIns="0" tIns="0" rIns="0" bIns="0">
-            <a:spAutoFit/>
-          </a:bodyPr>
-          <a:lstStyle/>
-          <a:p>
-            <a:pPr algn="l">
-              <a:lnSpc>
-                <a:spcPct val="100000"/>
-              </a:lnSpc>
-              <a:spcAft>
-                <a:spcPts val="900"/>
-              </a:spcAft>
-              <a:defRPr sz="2200" b="0">
-                <a:solidFill>
-                  <a:srgbClr val="222222"/>
-                </a:solidFill>
-                <a:latin typeface="Calibri"/>
-              </a:defRPr>
-            </a:pPr>
-            <a:r>
-              <a:rPr sz="2200" b="0">
+          <a:p>
+            <a:pPr algn="l">
+              <a:lnSpc>
+                <a:spcPct val="100000"/>
+              </a:lnSpc>
+              <a:spcAft>
+                <a:spcPts val="600"/>
+              </a:spcAft>
+              <a:defRPr sz="1900" b="0">
+                <a:solidFill>
+                  <a:srgbClr val="222222"/>
+                </a:solidFill>
+                <a:latin typeface="Calibri"/>
+              </a:defRPr>
+            </a:pPr>
+            <a:r>
+              <a:rPr sz="1900" b="0">
                 <a:solidFill>
                   <a:srgbClr val="222222"/>
                 </a:solidFill>
@@ -20534,17 +20511,17 @@
                 <a:spcPct val="100000"/>
               </a:lnSpc>
               <a:spcAft>
-                <a:spcPts val="900"/>
-              </a:spcAft>
-              <a:defRPr sz="2200" b="0">
-                <a:solidFill>
-                  <a:srgbClr val="222222"/>
-                </a:solidFill>
-                <a:latin typeface="Calibri"/>
-              </a:defRPr>
-            </a:pPr>
-            <a:r>
-              <a:rPr sz="2200" b="0">
+                <a:spcPts val="600"/>
+              </a:spcAft>
+              <a:defRPr sz="1900" b="0">
+                <a:solidFill>
+                  <a:srgbClr val="222222"/>
+                </a:solidFill>
+                <a:latin typeface="Calibri"/>
+              </a:defRPr>
+            </a:pPr>
+            <a:r>
+              <a:rPr sz="1900" b="0">
                 <a:solidFill>
                   <a:srgbClr val="222222"/>
                 </a:solidFill>
@@ -20559,33 +20536,33 @@
                 <a:spcPct val="100000"/>
               </a:lnSpc>
               <a:spcAft>
-                <a:spcPts val="900"/>
-              </a:spcAft>
-              <a:defRPr sz="2200" b="0">
-                <a:solidFill>
-                  <a:srgbClr val="222222"/>
-                </a:solidFill>
-                <a:latin typeface="Calibri"/>
-              </a:defRPr>
-            </a:pPr>
-          </a:p>
-          <a:p>
-            <a:pPr algn="l">
-              <a:lnSpc>
-                <a:spcPct val="100000"/>
-              </a:lnSpc>
-              <a:spcAft>
-                <a:spcPts val="900"/>
-              </a:spcAft>
-              <a:defRPr sz="2200" b="0">
-                <a:solidFill>
-                  <a:srgbClr val="222222"/>
-                </a:solidFill>
-                <a:latin typeface="Calibri"/>
-              </a:defRPr>
-            </a:pPr>
-            <a:r>
-              <a:rPr sz="2200" b="0">
+                <a:spcPts val="600"/>
+              </a:spcAft>
+              <a:defRPr sz="950" b="0">
+                <a:solidFill>
+                  <a:srgbClr val="222222"/>
+                </a:solidFill>
+                <a:latin typeface="Calibri"/>
+              </a:defRPr>
+            </a:pPr>
+          </a:p>
+          <a:p>
+            <a:pPr algn="l">
+              <a:lnSpc>
+                <a:spcPct val="100000"/>
+              </a:lnSpc>
+              <a:spcAft>
+                <a:spcPts val="600"/>
+              </a:spcAft>
+              <a:defRPr sz="1900" b="0">
+                <a:solidFill>
+                  <a:srgbClr val="222222"/>
+                </a:solidFill>
+                <a:latin typeface="Calibri"/>
+              </a:defRPr>
+            </a:pPr>
+            <a:r>
+              <a:rPr sz="1900" b="0">
                 <a:solidFill>
                   <a:srgbClr val="222222"/>
                 </a:solidFill>
@@ -20600,17 +20577,17 @@
                 <a:spcPct val="100000"/>
               </a:lnSpc>
               <a:spcAft>
-                <a:spcPts val="900"/>
-              </a:spcAft>
-              <a:defRPr sz="2200" b="0">
-                <a:solidFill>
-                  <a:srgbClr val="222222"/>
-                </a:solidFill>
-                <a:latin typeface="Calibri"/>
-              </a:defRPr>
-            </a:pPr>
-            <a:r>
-              <a:rPr sz="2200" b="0">
+                <a:spcPts val="600"/>
+              </a:spcAft>
+              <a:defRPr sz="1900" b="0">
+                <a:solidFill>
+                  <a:srgbClr val="222222"/>
+                </a:solidFill>
+                <a:latin typeface="Calibri"/>
+              </a:defRPr>
+            </a:pPr>
+            <a:r>
+              <a:rPr sz="1900" b="0">
                 <a:solidFill>
                   <a:srgbClr val="222222"/>
                 </a:solidFill>
@@ -20623,7 +20600,7 @@
       </p:sp>
       <p:sp>
         <p:nvSpPr>
-          <p:cNvPr id="9" name="Rounded Rectangle 8"/>
+          <p:cNvPr id="8" name="Rounded Rectangle 7"/>
           <p:cNvSpPr/>
           <p:nvPr/>
         </p:nvSpPr>
@@ -22840,6 +22817,22 @@
               <a:spcAft>
                 <a:spcPts val="600"/>
               </a:spcAft>
+              <a:defRPr sz="1000" b="0">
+                <a:solidFill>
+                  <a:srgbClr val="222222"/>
+                </a:solidFill>
+                <a:latin typeface="Calibri"/>
+              </a:defRPr>
+            </a:pPr>
+          </a:p>
+          <a:p>
+            <a:pPr algn="l">
+              <a:lnSpc>
+                <a:spcPct val="100000"/>
+              </a:lnSpc>
+              <a:spcAft>
+                <a:spcPts val="600"/>
+              </a:spcAft>
               <a:defRPr sz="2000" b="0">
                 <a:solidFill>
                   <a:srgbClr val="222222"/>
@@ -22847,6 +22840,15 @@
                 <a:latin typeface="Calibri"/>
               </a:defRPr>
             </a:pPr>
+            <a:r>
+              <a:rPr sz="2000" b="0">
+                <a:solidFill>
+                  <a:srgbClr val="222222"/>
+                </a:solidFill>
+                <a:latin typeface="Calibri"/>
+              </a:rPr>
+              <a:t>That is a better place to start anyway. Before you can make something blink, you have to make a circuit that works - and a circuit is the thing underneath everything else on this vehicle.</a:t>
+            </a:r>
           </a:p>
           <a:p>
             <a:pPr algn="l">
@@ -22856,32 +22858,7 @@
               <a:spcAft>
                 <a:spcPts val="600"/>
               </a:spcAft>
-              <a:defRPr sz="2000" b="0">
-                <a:solidFill>
-                  <a:srgbClr val="222222"/>
-                </a:solidFill>
-                <a:latin typeface="Calibri"/>
-              </a:defRPr>
-            </a:pPr>
-            <a:r>
-              <a:rPr sz="2000" b="0">
-                <a:solidFill>
-                  <a:srgbClr val="222222"/>
-                </a:solidFill>
-                <a:latin typeface="Calibri"/>
-              </a:rPr>
-              <a:t>That is a better place to start anyway. Before you can make something blink, you have to make a circuit that works - and a circuit is the thing underneath everything else on this vehicle.</a:t>
-            </a:r>
-          </a:p>
-          <a:p>
-            <a:pPr algn="l">
-              <a:lnSpc>
-                <a:spcPct val="100000"/>
-              </a:lnSpc>
-              <a:spcAft>
-                <a:spcPts val="600"/>
-              </a:spcAft>
-              <a:defRPr sz="2000" b="0">
+              <a:defRPr sz="1000" b="0">
                 <a:solidFill>
                   <a:srgbClr val="222222"/>
                 </a:solidFill>
@@ -24839,7 +24816,7 @@
               <a:spcAft>
                 <a:spcPts val="0"/>
               </a:spcAft>
-              <a:defRPr sz="1400" b="0">
+              <a:defRPr sz="700" b="0">
                 <a:solidFill>
                   <a:srgbClr val="222222"/>
                 </a:solidFill>
@@ -24908,7 +24885,7 @@
         <p:spPr>
           <a:xfrm>
             <a:off x="7909560" y="3383280"/>
-            <a:ext cx="3749039" cy="2091944"/>
+            <a:ext cx="3749039" cy="1813052"/>
           </a:xfrm>
           <a:prstGeom prst="rect">
             <a:avLst/>
@@ -24953,6 +24930,22 @@
               <a:spcAft>
                 <a:spcPts val="0"/>
               </a:spcAft>
+              <a:defRPr sz="900" b="0">
+                <a:solidFill>
+                  <a:srgbClr val="222222"/>
+                </a:solidFill>
+                <a:latin typeface="Calibri"/>
+              </a:defRPr>
+            </a:pPr>
+          </a:p>
+          <a:p>
+            <a:pPr algn="l">
+              <a:lnSpc>
+                <a:spcPct val="100000"/>
+              </a:lnSpc>
+              <a:spcAft>
+                <a:spcPts val="0"/>
+              </a:spcAft>
               <a:defRPr sz="1800" b="0">
                 <a:solidFill>
                   <a:srgbClr val="222222"/>
@@ -24960,6 +24953,15 @@
                 <a:latin typeface="Calibri"/>
               </a:defRPr>
             </a:pPr>
+            <a:r>
+              <a:rPr sz="1800" b="0">
+                <a:solidFill>
+                  <a:srgbClr val="222222"/>
+                </a:solidFill>
+                <a:latin typeface="Calibri"/>
+              </a:rPr>
+              <a:t>(3.3 - 2.0) / 220 = about 6 mA</a:t>
+            </a:r>
           </a:p>
           <a:p>
             <a:pPr algn="l">
@@ -24969,32 +24971,7 @@
               <a:spcAft>
                 <a:spcPts val="0"/>
               </a:spcAft>
-              <a:defRPr sz="1800" b="0">
-                <a:solidFill>
-                  <a:srgbClr val="222222"/>
-                </a:solidFill>
-                <a:latin typeface="Calibri"/>
-              </a:defRPr>
-            </a:pPr>
-            <a:r>
-              <a:rPr sz="1800" b="0">
-                <a:solidFill>
-                  <a:srgbClr val="222222"/>
-                </a:solidFill>
-                <a:latin typeface="Calibri"/>
-              </a:rPr>
-              <a:t>(3.3 - 2.0) / 220 = about 6 mA</a:t>
-            </a:r>
-          </a:p>
-          <a:p>
-            <a:pPr algn="l">
-              <a:lnSpc>
-                <a:spcPct val="100000"/>
-              </a:lnSpc>
-              <a:spcAft>
-                <a:spcPts val="0"/>
-              </a:spcAft>
-              <a:defRPr sz="1800" b="0">
+              <a:defRPr sz="900" b="0">
                 <a:solidFill>
                   <a:srgbClr val="222222"/>
                 </a:solidFill>
@@ -25790,15 +25767,15 @@
               <a:spcAft>
                 <a:spcPts val="600"/>
               </a:spcAft>
-              <a:defRPr sz="1900" b="0">
-                <a:solidFill>
-                  <a:srgbClr val="222222"/>
-                </a:solidFill>
-                <a:latin typeface="Calibri"/>
-              </a:defRPr>
-            </a:pPr>
-            <a:r>
-              <a:rPr sz="1900" b="0">
+              <a:defRPr sz="2000" b="0">
+                <a:solidFill>
+                  <a:srgbClr val="222222"/>
+                </a:solidFill>
+                <a:latin typeface="Calibri"/>
+              </a:defRPr>
+            </a:pPr>
+            <a:r>
+              <a:rPr sz="2000" b="0">
                 <a:solidFill>
                   <a:srgbClr val="222222"/>
                 </a:solidFill>
@@ -25815,7 +25792,7 @@
               <a:spcAft>
                 <a:spcPts val="600"/>
               </a:spcAft>
-              <a:defRPr sz="1900" b="0">
+              <a:defRPr sz="1000" b="0">
                 <a:solidFill>
                   <a:srgbClr val="222222"/>
                 </a:solidFill>
@@ -25831,15 +25808,15 @@
               <a:spcAft>
                 <a:spcPts val="600"/>
               </a:spcAft>
-              <a:defRPr sz="1900" b="0">
-                <a:solidFill>
-                  <a:srgbClr val="222222"/>
-                </a:solidFill>
-                <a:latin typeface="Calibri"/>
-              </a:defRPr>
-            </a:pPr>
-            <a:r>
-              <a:rPr sz="1900" b="0">
+              <a:defRPr sz="2000" b="0">
+                <a:solidFill>
+                  <a:srgbClr val="222222"/>
+                </a:solidFill>
+                <a:latin typeface="Calibri"/>
+              </a:defRPr>
+            </a:pPr>
+            <a:r>
+              <a:rPr sz="2000" b="0">
                 <a:solidFill>
                   <a:srgbClr val="222222"/>
                 </a:solidFill>
@@ -25856,15 +25833,15 @@
               <a:spcAft>
                 <a:spcPts val="600"/>
               </a:spcAft>
-              <a:defRPr sz="1900" b="0">
-                <a:solidFill>
-                  <a:srgbClr val="222222"/>
-                </a:solidFill>
-                <a:latin typeface="Calibri"/>
-              </a:defRPr>
-            </a:pPr>
-            <a:r>
-              <a:rPr sz="1900" b="0">
+              <a:defRPr sz="2000" b="0">
+                <a:solidFill>
+                  <a:srgbClr val="222222"/>
+                </a:solidFill>
+                <a:latin typeface="Calibri"/>
+              </a:defRPr>
+            </a:pPr>
+            <a:r>
+              <a:rPr sz="2000" b="0">
                 <a:solidFill>
                   <a:srgbClr val="222222"/>
                 </a:solidFill>
@@ -25881,15 +25858,15 @@
               <a:spcAft>
                 <a:spcPts val="600"/>
               </a:spcAft>
-              <a:defRPr sz="1900" b="0">
-                <a:solidFill>
-                  <a:srgbClr val="222222"/>
-                </a:solidFill>
-                <a:latin typeface="Calibri"/>
-              </a:defRPr>
-            </a:pPr>
-            <a:r>
-              <a:rPr sz="1900" b="0">
+              <a:defRPr sz="2000" b="0">
+                <a:solidFill>
+                  <a:srgbClr val="222222"/>
+                </a:solidFill>
+                <a:latin typeface="Calibri"/>
+              </a:defRPr>
+            </a:pPr>
+            <a:r>
+              <a:rPr sz="2000" b="0">
                 <a:solidFill>
                   <a:srgbClr val="222222"/>
                 </a:solidFill>
@@ -25906,7 +25883,7 @@
               <a:spcAft>
                 <a:spcPts val="600"/>
               </a:spcAft>
-              <a:defRPr sz="1900" b="0">
+              <a:defRPr sz="1000" b="0">
                 <a:solidFill>
                   <a:srgbClr val="222222"/>
                 </a:solidFill>
@@ -25922,15 +25899,15 @@
               <a:spcAft>
                 <a:spcPts val="600"/>
               </a:spcAft>
-              <a:defRPr sz="1900" b="0">
-                <a:solidFill>
-                  <a:srgbClr val="222222"/>
-                </a:solidFill>
-                <a:latin typeface="Calibri"/>
-              </a:defRPr>
-            </a:pPr>
-            <a:r>
-              <a:rPr sz="1900" b="0">
+              <a:defRPr sz="2000" b="0">
+                <a:solidFill>
+                  <a:srgbClr val="222222"/>
+                </a:solidFill>
+                <a:latin typeface="Calibri"/>
+              </a:defRPr>
+            </a:pPr>
+            <a:r>
+              <a:rPr sz="2000" b="0">
                 <a:solidFill>
                   <a:srgbClr val="222222"/>
                 </a:solidFill>
@@ -27958,7 +27935,7 @@
               <a:spcAft>
                 <a:spcPts val="800"/>
               </a:spcAft>
-              <a:defRPr sz="1900" b="0">
+              <a:defRPr sz="950" b="0">
                 <a:solidFill>
                   <a:srgbClr val="222222"/>
                 </a:solidFill>
@@ -29482,7 +29459,7 @@
         <p:spPr>
           <a:xfrm>
             <a:off x="502920" y="1188720"/>
-            <a:ext cx="5364327" cy="3986784"/>
+            <a:ext cx="11185855" cy="3986784"/>
           </a:xfrm>
           <a:prstGeom prst="rect">
             <a:avLst/>
@@ -29500,17 +29477,17 @@
                 <a:spcPct val="100000"/>
               </a:lnSpc>
               <a:spcAft>
-                <a:spcPts val="900"/>
-              </a:spcAft>
-              <a:defRPr sz="2100" b="0">
-                <a:solidFill>
-                  <a:srgbClr val="222222"/>
-                </a:solidFill>
-                <a:latin typeface="Calibri"/>
-              </a:defRPr>
-            </a:pPr>
-            <a:r>
-              <a:rPr sz="2100" b="0">
+                <a:spcPts val="600"/>
+              </a:spcAft>
+              <a:defRPr sz="1800" b="0">
+                <a:solidFill>
+                  <a:srgbClr val="222222"/>
+                </a:solidFill>
+                <a:latin typeface="Calibri"/>
+              </a:defRPr>
+            </a:pPr>
+            <a:r>
+              <a:rPr sz="1800" b="0">
                 <a:solidFill>
                   <a:srgbClr val="222222"/>
                 </a:solidFill>
@@ -29525,17 +29502,17 @@
                 <a:spcPct val="100000"/>
               </a:lnSpc>
               <a:spcAft>
-                <a:spcPts val="900"/>
-              </a:spcAft>
-              <a:defRPr sz="2100" b="0">
-                <a:solidFill>
-                  <a:srgbClr val="222222"/>
-                </a:solidFill>
-                <a:latin typeface="Calibri"/>
-              </a:defRPr>
-            </a:pPr>
-            <a:r>
-              <a:rPr sz="2100" b="0">
+                <a:spcPts val="600"/>
+              </a:spcAft>
+              <a:defRPr sz="1800" b="0">
+                <a:solidFill>
+                  <a:srgbClr val="222222"/>
+                </a:solidFill>
+                <a:latin typeface="Calibri"/>
+              </a:defRPr>
+            </a:pPr>
+            <a:r>
+              <a:rPr sz="1800" b="0">
                 <a:solidFill>
                   <a:srgbClr val="222222"/>
                 </a:solidFill>
@@ -29550,17 +29527,17 @@
                 <a:spcPct val="100000"/>
               </a:lnSpc>
               <a:spcAft>
-                <a:spcPts val="900"/>
-              </a:spcAft>
-              <a:defRPr sz="2100" b="0">
-                <a:solidFill>
-                  <a:srgbClr val="222222"/>
-                </a:solidFill>
-                <a:latin typeface="Calibri"/>
-              </a:defRPr>
-            </a:pPr>
-            <a:r>
-              <a:rPr sz="2100" b="0">
+                <a:spcPts val="600"/>
+              </a:spcAft>
+              <a:defRPr sz="1800" b="0">
+                <a:solidFill>
+                  <a:srgbClr val="222222"/>
+                </a:solidFill>
+                <a:latin typeface="Calibri"/>
+              </a:defRPr>
+            </a:pPr>
+            <a:r>
+              <a:rPr sz="1800" b="0">
                 <a:solidFill>
                   <a:srgbClr val="222222"/>
                 </a:solidFill>
@@ -29575,17 +29552,17 @@
                 <a:spcPct val="100000"/>
               </a:lnSpc>
               <a:spcAft>
-                <a:spcPts val="900"/>
-              </a:spcAft>
-              <a:defRPr sz="2100" b="0">
-                <a:solidFill>
-                  <a:srgbClr val="222222"/>
-                </a:solidFill>
-                <a:latin typeface="Calibri"/>
-              </a:defRPr>
-            </a:pPr>
-            <a:r>
-              <a:rPr sz="2100" b="0">
+                <a:spcPts val="600"/>
+              </a:spcAft>
+              <a:defRPr sz="1800" b="0">
+                <a:solidFill>
+                  <a:srgbClr val="222222"/>
+                </a:solidFill>
+                <a:latin typeface="Calibri"/>
+              </a:defRPr>
+            </a:pPr>
+            <a:r>
+              <a:rPr sz="1800" b="0">
                 <a:solidFill>
                   <a:srgbClr val="222222"/>
                 </a:solidFill>
@@ -29594,46 +29571,39 @@
               <a:t>Serial.println(x);       prints and moves to a new line.</a:t>
             </a:r>
           </a:p>
-        </p:txBody>
-      </p:sp>
-      <p:sp>
-        <p:nvSpPr>
-          <p:cNvPr id="7" name="TextBox 6"/>
-          <p:cNvSpPr txBox="1"/>
-          <p:nvPr/>
-        </p:nvSpPr>
-        <p:spPr>
-          <a:xfrm>
-            <a:off x="6324447" y="1188720"/>
-            <a:ext cx="5364327" cy="3986784"/>
-          </a:xfrm>
-          <a:prstGeom prst="rect">
-            <a:avLst/>
-          </a:prstGeom>
-          <a:noFill/>
-        </p:spPr>
-        <p:txBody>
-          <a:bodyPr wrap="square" lIns="0" tIns="0" rIns="0" bIns="0">
-            <a:spAutoFit/>
-          </a:bodyPr>
-          <a:lstStyle/>
-          <a:p>
-            <a:pPr algn="l">
-              <a:lnSpc>
-                <a:spcPct val="100000"/>
-              </a:lnSpc>
-              <a:spcAft>
-                <a:spcPts val="900"/>
-              </a:spcAft>
-              <a:defRPr sz="2000" b="0">
-                <a:solidFill>
-                  <a:srgbClr val="222222"/>
-                </a:solidFill>
-                <a:latin typeface="Calibri"/>
-              </a:defRPr>
-            </a:pPr>
-            <a:r>
-              <a:rPr sz="2000" b="0">
+          <a:p>
+            <a:pPr algn="l">
+              <a:lnSpc>
+                <a:spcPct val="100000"/>
+              </a:lnSpc>
+              <a:spcAft>
+                <a:spcPts val="600"/>
+              </a:spcAft>
+              <a:defRPr sz="900" b="0">
+                <a:solidFill>
+                  <a:srgbClr val="222222"/>
+                </a:solidFill>
+                <a:latin typeface="Calibri"/>
+              </a:defRPr>
+            </a:pPr>
+          </a:p>
+          <a:p>
+            <a:pPr algn="l">
+              <a:lnSpc>
+                <a:spcPct val="100000"/>
+              </a:lnSpc>
+              <a:spcAft>
+                <a:spcPts val="600"/>
+              </a:spcAft>
+              <a:defRPr sz="1800" b="0">
+                <a:solidFill>
+                  <a:srgbClr val="222222"/>
+                </a:solidFill>
+                <a:latin typeface="Calibri"/>
+              </a:defRPr>
+            </a:pPr>
+            <a:r>
+              <a:rPr sz="1800" b="0">
                 <a:solidFill>
                   <a:srgbClr val="222222"/>
                 </a:solidFill>
@@ -29648,17 +29618,17 @@
                 <a:spcPct val="100000"/>
               </a:lnSpc>
               <a:spcAft>
-                <a:spcPts val="900"/>
-              </a:spcAft>
-              <a:defRPr sz="2000" b="0">
-                <a:solidFill>
-                  <a:srgbClr val="222222"/>
-                </a:solidFill>
-                <a:latin typeface="Calibri"/>
-              </a:defRPr>
-            </a:pPr>
-            <a:r>
-              <a:rPr sz="2000" b="0">
+                <a:spcPts val="600"/>
+              </a:spcAft>
+              <a:defRPr sz="1800" b="0">
+                <a:solidFill>
+                  <a:srgbClr val="222222"/>
+                </a:solidFill>
+                <a:latin typeface="Calibri"/>
+              </a:defRPr>
+            </a:pPr>
+            <a:r>
+              <a:rPr sz="1800" b="0">
                 <a:solidFill>
                   <a:srgbClr val="222222"/>
                 </a:solidFill>
@@ -29673,33 +29643,33 @@
                 <a:spcPct val="100000"/>
               </a:lnSpc>
               <a:spcAft>
-                <a:spcPts val="900"/>
-              </a:spcAft>
-              <a:defRPr sz="2000" b="0">
-                <a:solidFill>
-                  <a:srgbClr val="222222"/>
-                </a:solidFill>
-                <a:latin typeface="Calibri"/>
-              </a:defRPr>
-            </a:pPr>
-          </a:p>
-          <a:p>
-            <a:pPr algn="l">
-              <a:lnSpc>
-                <a:spcPct val="100000"/>
-              </a:lnSpc>
-              <a:spcAft>
-                <a:spcPts val="900"/>
-              </a:spcAft>
-              <a:defRPr sz="2000" b="0">
-                <a:solidFill>
-                  <a:srgbClr val="222222"/>
-                </a:solidFill>
-                <a:latin typeface="Calibri"/>
-              </a:defRPr>
-            </a:pPr>
-            <a:r>
-              <a:rPr sz="2000" b="0">
+                <a:spcPts val="600"/>
+              </a:spcAft>
+              <a:defRPr sz="900" b="0">
+                <a:solidFill>
+                  <a:srgbClr val="222222"/>
+                </a:solidFill>
+                <a:latin typeface="Calibri"/>
+              </a:defRPr>
+            </a:pPr>
+          </a:p>
+          <a:p>
+            <a:pPr algn="l">
+              <a:lnSpc>
+                <a:spcPct val="100000"/>
+              </a:lnSpc>
+              <a:spcAft>
+                <a:spcPts val="600"/>
+              </a:spcAft>
+              <a:defRPr sz="1800" b="0">
+                <a:solidFill>
+                  <a:srgbClr val="222222"/>
+                </a:solidFill>
+                <a:latin typeface="Calibri"/>
+              </a:defRPr>
+            </a:pPr>
+            <a:r>
+              <a:rPr sz="1800" b="0">
                 <a:solidFill>
                   <a:srgbClr val="222222"/>
                 </a:solidFill>
@@ -29712,7 +29682,7 @@
       </p:sp>
       <p:sp>
         <p:nvSpPr>
-          <p:cNvPr id="8" name="Rounded Rectangle 7"/>
+          <p:cNvPr id="7" name="Rounded Rectangle 6"/>
           <p:cNvSpPr/>
           <p:nvPr/>
         </p:nvSpPr>
@@ -33087,15 +33057,15 @@
               <a:spcAft>
                 <a:spcPts val="600"/>
               </a:spcAft>
-              <a:defRPr sz="1900" b="0">
-                <a:solidFill>
-                  <a:srgbClr val="222222"/>
-                </a:solidFill>
-                <a:latin typeface="Calibri"/>
-              </a:defRPr>
-            </a:pPr>
-            <a:r>
-              <a:rPr sz="1900" b="0">
+              <a:defRPr sz="2000" b="0">
+                <a:solidFill>
+                  <a:srgbClr val="222222"/>
+                </a:solidFill>
+                <a:latin typeface="Calibri"/>
+              </a:defRPr>
+            </a:pPr>
+            <a:r>
+              <a:rPr sz="2000" b="0">
                 <a:solidFill>
                   <a:srgbClr val="222222"/>
                 </a:solidFill>
@@ -33112,15 +33082,15 @@
               <a:spcAft>
                 <a:spcPts val="600"/>
               </a:spcAft>
-              <a:defRPr sz="1900" b="0">
-                <a:solidFill>
-                  <a:srgbClr val="222222"/>
-                </a:solidFill>
-                <a:latin typeface="Calibri"/>
-              </a:defRPr>
-            </a:pPr>
-            <a:r>
-              <a:rPr sz="1900" b="0">
+              <a:defRPr sz="2000" b="0">
+                <a:solidFill>
+                  <a:srgbClr val="222222"/>
+                </a:solidFill>
+                <a:latin typeface="Calibri"/>
+              </a:defRPr>
+            </a:pPr>
+            <a:r>
+              <a:rPr sz="2000" b="0">
                 <a:solidFill>
                   <a:srgbClr val="222222"/>
                 </a:solidFill>
@@ -33137,15 +33107,15 @@
               <a:spcAft>
                 <a:spcPts val="600"/>
               </a:spcAft>
-              <a:defRPr sz="1900" b="0">
-                <a:solidFill>
-                  <a:srgbClr val="222222"/>
-                </a:solidFill>
-                <a:latin typeface="Calibri"/>
-              </a:defRPr>
-            </a:pPr>
-            <a:r>
-              <a:rPr sz="1900" b="0">
+              <a:defRPr sz="2000" b="0">
+                <a:solidFill>
+                  <a:srgbClr val="222222"/>
+                </a:solidFill>
+                <a:latin typeface="Calibri"/>
+              </a:defRPr>
+            </a:pPr>
+            <a:r>
+              <a:rPr sz="2000" b="0">
                 <a:solidFill>
                   <a:srgbClr val="222222"/>
                 </a:solidFill>
@@ -33162,15 +33132,15 @@
               <a:spcAft>
                 <a:spcPts val="600"/>
               </a:spcAft>
-              <a:defRPr sz="1900" b="0">
-                <a:solidFill>
-                  <a:srgbClr val="222222"/>
-                </a:solidFill>
-                <a:latin typeface="Calibri"/>
-              </a:defRPr>
-            </a:pPr>
-            <a:r>
-              <a:rPr sz="1900" b="0">
+              <a:defRPr sz="2000" b="0">
+                <a:solidFill>
+                  <a:srgbClr val="222222"/>
+                </a:solidFill>
+                <a:latin typeface="Calibri"/>
+              </a:defRPr>
+            </a:pPr>
+            <a:r>
+              <a:rPr sz="2000" b="0">
                 <a:solidFill>
                   <a:srgbClr val="222222"/>
                 </a:solidFill>
@@ -33187,15 +33157,15 @@
               <a:spcAft>
                 <a:spcPts val="600"/>
               </a:spcAft>
-              <a:defRPr sz="1900" b="0">
-                <a:solidFill>
-                  <a:srgbClr val="222222"/>
-                </a:solidFill>
-                <a:latin typeface="Calibri"/>
-              </a:defRPr>
-            </a:pPr>
-            <a:r>
-              <a:rPr sz="1900" b="0">
+              <a:defRPr sz="2000" b="0">
+                <a:solidFill>
+                  <a:srgbClr val="222222"/>
+                </a:solidFill>
+                <a:latin typeface="Calibri"/>
+              </a:defRPr>
+            </a:pPr>
+            <a:r>
+              <a:rPr sz="2000" b="0">
                 <a:solidFill>
                   <a:srgbClr val="222222"/>
                 </a:solidFill>
@@ -33212,7 +33182,7 @@
               <a:spcAft>
                 <a:spcPts val="600"/>
               </a:spcAft>
-              <a:defRPr sz="1900" b="0">
+              <a:defRPr sz="1000" b="0">
                 <a:solidFill>
                   <a:srgbClr val="222222"/>
                 </a:solidFill>
@@ -33228,15 +33198,15 @@
               <a:spcAft>
                 <a:spcPts val="600"/>
               </a:spcAft>
-              <a:defRPr sz="1900" b="0">
-                <a:solidFill>
-                  <a:srgbClr val="222222"/>
-                </a:solidFill>
-                <a:latin typeface="Calibri"/>
-              </a:defRPr>
-            </a:pPr>
-            <a:r>
-              <a:rPr sz="1900" b="0">
+              <a:defRPr sz="2000" b="0">
+                <a:solidFill>
+                  <a:srgbClr val="222222"/>
+                </a:solidFill>
+                <a:latin typeface="Calibri"/>
+              </a:defRPr>
+            </a:pPr>
+            <a:r>
+              <a:rPr sz="2000" b="0">
                 <a:solidFill>
                   <a:srgbClr val="222222"/>
                 </a:solidFill>

--- a/ground-vehicle/docs/courses/beginner-switch/l1_introduction.pptx
+++ b/ground-vehicle/docs/courses/beginner-switch/l1_introduction.pptx
@@ -10266,7 +10266,7 @@
         <p:spPr>
           <a:xfrm>
             <a:off x="502920" y="1188720"/>
-            <a:ext cx="5364327" cy="457200"/>
+            <a:ext cx="4278540" cy="457200"/>
           </a:xfrm>
           <a:prstGeom prst="rect">
             <a:avLst/>
@@ -10284,7 +10284,7 @@
                 <a:spcPct val="100000"/>
               </a:lnSpc>
               <a:spcAft>
-                <a:spcPts val="600"/>
+                <a:spcPts val="300"/>
               </a:spcAft>
               <a:defRPr sz="1900" b="1">
                 <a:solidFill>
@@ -10314,7 +10314,7 @@
         <p:spPr>
           <a:xfrm>
             <a:off x="502920" y="1700784"/>
-            <a:ext cx="5364327" cy="3474720"/>
+            <a:ext cx="4278540" cy="3474720"/>
           </a:xfrm>
           <a:prstGeom prst="rect">
             <a:avLst/>
@@ -10334,15 +10334,15 @@
               <a:spcAft>
                 <a:spcPts val="800"/>
               </a:spcAft>
-              <a:defRPr sz="2000" b="0">
-                <a:solidFill>
-                  <a:srgbClr val="222222"/>
-                </a:solidFill>
-                <a:latin typeface="Calibri"/>
-              </a:defRPr>
-            </a:pPr>
-            <a:r>
-              <a:rPr sz="2000" b="0">
+              <a:defRPr sz="2200" b="0">
+                <a:solidFill>
+                  <a:srgbClr val="222222"/>
+                </a:solidFill>
+                <a:latin typeface="Calibri"/>
+              </a:defRPr>
+            </a:pPr>
+            <a:r>
+              <a:rPr sz="2200" b="0">
                 <a:solidFill>
                   <a:srgbClr val="222222"/>
                 </a:solidFill>
@@ -10359,15 +10359,15 @@
               <a:spcAft>
                 <a:spcPts val="800"/>
               </a:spcAft>
-              <a:defRPr sz="2000" b="0">
-                <a:solidFill>
-                  <a:srgbClr val="222222"/>
-                </a:solidFill>
-                <a:latin typeface="Calibri"/>
-              </a:defRPr>
-            </a:pPr>
-            <a:r>
-              <a:rPr sz="2000" b="0">
+              <a:defRPr sz="2200" b="0">
+                <a:solidFill>
+                  <a:srgbClr val="222222"/>
+                </a:solidFill>
+                <a:latin typeface="Calibri"/>
+              </a:defRPr>
+            </a:pPr>
+            <a:r>
+              <a:rPr sz="2200" b="0">
                 <a:solidFill>
                   <a:srgbClr val="222222"/>
                 </a:solidFill>
@@ -10384,15 +10384,15 @@
               <a:spcAft>
                 <a:spcPts val="800"/>
               </a:spcAft>
-              <a:defRPr sz="2000" b="0">
-                <a:solidFill>
-                  <a:srgbClr val="222222"/>
-                </a:solidFill>
-                <a:latin typeface="Calibri"/>
-              </a:defRPr>
-            </a:pPr>
-            <a:r>
-              <a:rPr sz="2000" b="0">
+              <a:defRPr sz="2200" b="0">
+                <a:solidFill>
+                  <a:srgbClr val="222222"/>
+                </a:solidFill>
+                <a:latin typeface="Calibri"/>
+              </a:defRPr>
+            </a:pPr>
+            <a:r>
+              <a:rPr sz="2200" b="0">
                 <a:solidFill>
                   <a:srgbClr val="222222"/>
                 </a:solidFill>
@@ -10409,15 +10409,15 @@
               <a:spcAft>
                 <a:spcPts val="800"/>
               </a:spcAft>
-              <a:defRPr sz="2000" b="0">
-                <a:solidFill>
-                  <a:srgbClr val="222222"/>
-                </a:solidFill>
-                <a:latin typeface="Calibri"/>
-              </a:defRPr>
-            </a:pPr>
-            <a:r>
-              <a:rPr sz="2000" b="0">
+              <a:defRPr sz="2200" b="0">
+                <a:solidFill>
+                  <a:srgbClr val="222222"/>
+                </a:solidFill>
+                <a:latin typeface="Calibri"/>
+              </a:defRPr>
+            </a:pPr>
+            <a:r>
+              <a:rPr sz="2200" b="0">
                 <a:solidFill>
                   <a:srgbClr val="222222"/>
                 </a:solidFill>
@@ -10436,8 +10436,8 @@
         </p:nvSpPr>
         <p:spPr>
           <a:xfrm>
-            <a:off x="6324447" y="1188720"/>
-            <a:ext cx="5364327" cy="457200"/>
+            <a:off x="5238660" y="1188720"/>
+            <a:ext cx="6450115" cy="457200"/>
           </a:xfrm>
           <a:prstGeom prst="rect">
             <a:avLst/>
@@ -10455,7 +10455,7 @@
                 <a:spcPct val="100000"/>
               </a:lnSpc>
               <a:spcAft>
-                <a:spcPts val="600"/>
+                <a:spcPts val="300"/>
               </a:spcAft>
               <a:defRPr sz="1900" b="1">
                 <a:solidFill>
@@ -10484,8 +10484,8 @@
         </p:nvSpPr>
         <p:spPr>
           <a:xfrm>
-            <a:off x="6324447" y="1700784"/>
-            <a:ext cx="5364327" cy="3474720"/>
+            <a:off x="5238660" y="1700784"/>
+            <a:ext cx="6450115" cy="3474720"/>
           </a:xfrm>
           <a:prstGeom prst="rect">
             <a:avLst/>
@@ -10505,15 +10505,15 @@
               <a:spcAft>
                 <a:spcPts val="800"/>
               </a:spcAft>
-              <a:defRPr sz="1900" b="0">
-                <a:solidFill>
-                  <a:srgbClr val="222222"/>
-                </a:solidFill>
-                <a:latin typeface="Calibri"/>
-              </a:defRPr>
-            </a:pPr>
-            <a:r>
-              <a:rPr sz="1900" b="0">
+              <a:defRPr sz="2200" b="0">
+                <a:solidFill>
+                  <a:srgbClr val="222222"/>
+                </a:solidFill>
+                <a:latin typeface="Calibri"/>
+              </a:defRPr>
+            </a:pPr>
+            <a:r>
+              <a:rPr sz="2200" b="0">
                 <a:solidFill>
                   <a:srgbClr val="222222"/>
                 </a:solidFill>
@@ -10530,15 +10530,15 @@
               <a:spcAft>
                 <a:spcPts val="800"/>
               </a:spcAft>
-              <a:defRPr sz="1900" b="0">
-                <a:solidFill>
-                  <a:srgbClr val="222222"/>
-                </a:solidFill>
-                <a:latin typeface="Calibri"/>
-              </a:defRPr>
-            </a:pPr>
-            <a:r>
-              <a:rPr sz="1900" b="0">
+              <a:defRPr sz="2200" b="0">
+                <a:solidFill>
+                  <a:srgbClr val="222222"/>
+                </a:solidFill>
+                <a:latin typeface="Calibri"/>
+              </a:defRPr>
+            </a:pPr>
+            <a:r>
+              <a:rPr sz="2200" b="0">
                 <a:solidFill>
                   <a:srgbClr val="222222"/>
                 </a:solidFill>
@@ -10555,15 +10555,15 @@
               <a:spcAft>
                 <a:spcPts val="800"/>
               </a:spcAft>
-              <a:defRPr sz="1900" b="0">
-                <a:solidFill>
-                  <a:srgbClr val="222222"/>
-                </a:solidFill>
-                <a:latin typeface="Calibri"/>
-              </a:defRPr>
-            </a:pPr>
-            <a:r>
-              <a:rPr sz="1900" b="0">
+              <a:defRPr sz="2200" b="0">
+                <a:solidFill>
+                  <a:srgbClr val="222222"/>
+                </a:solidFill>
+                <a:latin typeface="Calibri"/>
+              </a:defRPr>
+            </a:pPr>
+            <a:r>
+              <a:rPr sz="2200" b="0">
                 <a:solidFill>
                   <a:srgbClr val="222222"/>
                 </a:solidFill>
@@ -10580,15 +10580,15 @@
               <a:spcAft>
                 <a:spcPts val="800"/>
               </a:spcAft>
-              <a:defRPr sz="1900" b="0">
-                <a:solidFill>
-                  <a:srgbClr val="222222"/>
-                </a:solidFill>
-                <a:latin typeface="Calibri"/>
-              </a:defRPr>
-            </a:pPr>
-            <a:r>
-              <a:rPr sz="1900" b="0">
+              <a:defRPr sz="2200" b="0">
+                <a:solidFill>
+                  <a:srgbClr val="222222"/>
+                </a:solidFill>
+                <a:latin typeface="Calibri"/>
+              </a:defRPr>
+            </a:pPr>
+            <a:r>
+              <a:rPr sz="2200" b="0">
                 <a:solidFill>
                   <a:srgbClr val="222222"/>
                 </a:solidFill>
@@ -11369,7 +11369,7 @@
         <p:spPr>
           <a:xfrm>
             <a:off x="502920" y="1188720"/>
-            <a:ext cx="5364327" cy="457200"/>
+            <a:ext cx="6186894" cy="457200"/>
           </a:xfrm>
           <a:prstGeom prst="rect">
             <a:avLst/>
@@ -11417,7 +11417,7 @@
         <p:spPr>
           <a:xfrm>
             <a:off x="502920" y="1700784"/>
-            <a:ext cx="5364327" cy="3474720"/>
+            <a:ext cx="6186894" cy="3474720"/>
           </a:xfrm>
           <a:prstGeom prst="rect">
             <a:avLst/>
@@ -11435,7 +11435,7 @@
                 <a:spcPct val="100000"/>
               </a:lnSpc>
               <a:spcAft>
-                <a:spcPts val="400"/>
+                <a:spcPts val="800"/>
               </a:spcAft>
               <a:defRPr sz="1800" b="0">
                 <a:solidFill>
@@ -11460,7 +11460,7 @@
                 <a:spcPct val="100000"/>
               </a:lnSpc>
               <a:spcAft>
-                <a:spcPts val="400"/>
+                <a:spcPts val="800"/>
               </a:spcAft>
               <a:defRPr sz="1800" b="0">
                 <a:solidFill>
@@ -11485,7 +11485,7 @@
                 <a:spcPct val="100000"/>
               </a:lnSpc>
               <a:spcAft>
-                <a:spcPts val="400"/>
+                <a:spcPts val="800"/>
               </a:spcAft>
               <a:defRPr sz="1800" b="0">
                 <a:solidFill>
@@ -11510,7 +11510,7 @@
                 <a:spcPct val="100000"/>
               </a:lnSpc>
               <a:spcAft>
-                <a:spcPts val="400"/>
+                <a:spcPts val="800"/>
               </a:spcAft>
               <a:defRPr sz="1800" b="0">
                 <a:solidFill>
@@ -11535,7 +11535,7 @@
                 <a:spcPct val="100000"/>
               </a:lnSpc>
               <a:spcAft>
-                <a:spcPts val="400"/>
+                <a:spcPts val="800"/>
               </a:spcAft>
               <a:defRPr sz="1800" b="0">
                 <a:solidFill>
@@ -11564,8 +11564,8 @@
         </p:nvSpPr>
         <p:spPr>
           <a:xfrm>
-            <a:off x="6324447" y="1188720"/>
-            <a:ext cx="5364327" cy="457200"/>
+            <a:off x="7147014" y="1188720"/>
+            <a:ext cx="4541761" cy="457200"/>
           </a:xfrm>
           <a:prstGeom prst="rect">
             <a:avLst/>
@@ -11612,8 +11612,8 @@
         </p:nvSpPr>
         <p:spPr>
           <a:xfrm>
-            <a:off x="6324447" y="1700784"/>
-            <a:ext cx="5364327" cy="3474720"/>
+            <a:off x="7147014" y="1700784"/>
+            <a:ext cx="4541761" cy="3474720"/>
           </a:xfrm>
           <a:prstGeom prst="rect">
             <a:avLst/>
@@ -11633,15 +11633,15 @@
               <a:spcAft>
                 <a:spcPts val="800"/>
               </a:spcAft>
-              <a:defRPr sz="1800" b="0">
-                <a:solidFill>
-                  <a:srgbClr val="222222"/>
-                </a:solidFill>
-                <a:latin typeface="Calibri"/>
-              </a:defRPr>
-            </a:pPr>
-            <a:r>
-              <a:rPr sz="1800" b="0">
+              <a:defRPr sz="1900" b="0">
+                <a:solidFill>
+                  <a:srgbClr val="222222"/>
+                </a:solidFill>
+                <a:latin typeface="Calibri"/>
+              </a:defRPr>
+            </a:pPr>
+            <a:r>
+              <a:rPr sz="1900" b="0">
                 <a:solidFill>
                   <a:srgbClr val="222222"/>
                 </a:solidFill>
@@ -11658,15 +11658,15 @@
               <a:spcAft>
                 <a:spcPts val="800"/>
               </a:spcAft>
-              <a:defRPr sz="1800" b="0">
-                <a:solidFill>
-                  <a:srgbClr val="222222"/>
-                </a:solidFill>
-                <a:latin typeface="Calibri"/>
-              </a:defRPr>
-            </a:pPr>
-            <a:r>
-              <a:rPr sz="1800" b="0">
+              <a:defRPr sz="1900" b="0">
+                <a:solidFill>
+                  <a:srgbClr val="222222"/>
+                </a:solidFill>
+                <a:latin typeface="Calibri"/>
+              </a:defRPr>
+            </a:pPr>
+            <a:r>
+              <a:rPr sz="1900" b="0">
                 <a:solidFill>
                   <a:srgbClr val="222222"/>
                 </a:solidFill>
@@ -11683,15 +11683,15 @@
               <a:spcAft>
                 <a:spcPts val="800"/>
               </a:spcAft>
-              <a:defRPr sz="1800" b="0">
-                <a:solidFill>
-                  <a:srgbClr val="222222"/>
-                </a:solidFill>
-                <a:latin typeface="Calibri"/>
-              </a:defRPr>
-            </a:pPr>
-            <a:r>
-              <a:rPr sz="1800" b="0">
+              <a:defRPr sz="1900" b="0">
+                <a:solidFill>
+                  <a:srgbClr val="222222"/>
+                </a:solidFill>
+                <a:latin typeface="Calibri"/>
+              </a:defRPr>
+            </a:pPr>
+            <a:r>
+              <a:rPr sz="1900" b="0">
                 <a:solidFill>
                   <a:srgbClr val="222222"/>
                 </a:solidFill>
@@ -11708,15 +11708,15 @@
               <a:spcAft>
                 <a:spcPts val="800"/>
               </a:spcAft>
-              <a:defRPr sz="1800" b="0">
-                <a:solidFill>
-                  <a:srgbClr val="222222"/>
-                </a:solidFill>
-                <a:latin typeface="Calibri"/>
-              </a:defRPr>
-            </a:pPr>
-            <a:r>
-              <a:rPr sz="1800" b="0">
+              <a:defRPr sz="1900" b="0">
+                <a:solidFill>
+                  <a:srgbClr val="222222"/>
+                </a:solidFill>
+                <a:latin typeface="Calibri"/>
+              </a:defRPr>
+            </a:pPr>
+            <a:r>
+              <a:rPr sz="1900" b="0">
                 <a:solidFill>
                   <a:srgbClr val="222222"/>
                 </a:solidFill>
@@ -15817,7 +15817,7 @@
         <p:spPr>
           <a:xfrm>
             <a:off x="502920" y="1188720"/>
-            <a:ext cx="5364327" cy="457200"/>
+            <a:ext cx="5415114" cy="457200"/>
           </a:xfrm>
           <a:prstGeom prst="rect">
             <a:avLst/>
@@ -15865,7 +15865,7 @@
         <p:spPr>
           <a:xfrm>
             <a:off x="502920" y="1700784"/>
-            <a:ext cx="5364327" cy="4562856"/>
+            <a:ext cx="5415114" cy="4562856"/>
           </a:xfrm>
           <a:prstGeom prst="rect">
             <a:avLst/>
@@ -16012,8 +16012,8 @@
         </p:nvSpPr>
         <p:spPr>
           <a:xfrm>
-            <a:off x="6324447" y="1188720"/>
-            <a:ext cx="5364327" cy="457200"/>
+            <a:off x="6375234" y="1188720"/>
+            <a:ext cx="5313541" cy="457200"/>
           </a:xfrm>
           <a:prstGeom prst="rect">
             <a:avLst/>
@@ -16060,8 +16060,8 @@
         </p:nvSpPr>
         <p:spPr>
           <a:xfrm>
-            <a:off x="6324447" y="1700784"/>
-            <a:ext cx="5364327" cy="4562856"/>
+            <a:off x="6375234" y="1700784"/>
+            <a:ext cx="5313541" cy="4562856"/>
           </a:xfrm>
           <a:prstGeom prst="rect">
             <a:avLst/>
@@ -37773,7 +37773,7 @@
         <p:spPr>
           <a:xfrm>
             <a:off x="502920" y="1188720"/>
-            <a:ext cx="5364327" cy="457200"/>
+            <a:ext cx="5776968" cy="457200"/>
           </a:xfrm>
           <a:prstGeom prst="rect">
             <a:avLst/>
@@ -37821,7 +37821,7 @@
         <p:spPr>
           <a:xfrm>
             <a:off x="502920" y="1700784"/>
-            <a:ext cx="5364327" cy="3474720"/>
+            <a:ext cx="5776968" cy="3474720"/>
           </a:xfrm>
           <a:prstGeom prst="rect">
             <a:avLst/>
@@ -37841,15 +37841,15 @@
               <a:spcAft>
                 <a:spcPts val="800"/>
               </a:spcAft>
-              <a:defRPr sz="2100" b="0">
-                <a:solidFill>
-                  <a:srgbClr val="222222"/>
-                </a:solidFill>
-                <a:latin typeface="Calibri"/>
-              </a:defRPr>
-            </a:pPr>
-            <a:r>
-              <a:rPr sz="2100" b="0">
+              <a:defRPr sz="2200" b="0">
+                <a:solidFill>
+                  <a:srgbClr val="222222"/>
+                </a:solidFill>
+                <a:latin typeface="Calibri"/>
+              </a:defRPr>
+            </a:pPr>
+            <a:r>
+              <a:rPr sz="2200" b="0">
                 <a:solidFill>
                   <a:srgbClr val="222222"/>
                 </a:solidFill>
@@ -37866,15 +37866,15 @@
               <a:spcAft>
                 <a:spcPts val="800"/>
               </a:spcAft>
-              <a:defRPr sz="2100" b="0">
-                <a:solidFill>
-                  <a:srgbClr val="222222"/>
-                </a:solidFill>
-                <a:latin typeface="Calibri"/>
-              </a:defRPr>
-            </a:pPr>
-            <a:r>
-              <a:rPr sz="2100" b="0">
+              <a:defRPr sz="2200" b="0">
+                <a:solidFill>
+                  <a:srgbClr val="222222"/>
+                </a:solidFill>
+                <a:latin typeface="Calibri"/>
+              </a:defRPr>
+            </a:pPr>
+            <a:r>
+              <a:rPr sz="2200" b="0">
                 <a:solidFill>
                   <a:srgbClr val="222222"/>
                 </a:solidFill>
@@ -37891,15 +37891,15 @@
               <a:spcAft>
                 <a:spcPts val="800"/>
               </a:spcAft>
-              <a:defRPr sz="2100" b="0">
-                <a:solidFill>
-                  <a:srgbClr val="222222"/>
-                </a:solidFill>
-                <a:latin typeface="Calibri"/>
-              </a:defRPr>
-            </a:pPr>
-            <a:r>
-              <a:rPr sz="2100" b="0">
+              <a:defRPr sz="2200" b="0">
+                <a:solidFill>
+                  <a:srgbClr val="222222"/>
+                </a:solidFill>
+                <a:latin typeface="Calibri"/>
+              </a:defRPr>
+            </a:pPr>
+            <a:r>
+              <a:rPr sz="2200" b="0">
                 <a:solidFill>
                   <a:srgbClr val="222222"/>
                 </a:solidFill>
@@ -37916,15 +37916,15 @@
               <a:spcAft>
                 <a:spcPts val="800"/>
               </a:spcAft>
-              <a:defRPr sz="2100" b="0">
-                <a:solidFill>
-                  <a:srgbClr val="222222"/>
-                </a:solidFill>
-                <a:latin typeface="Calibri"/>
-              </a:defRPr>
-            </a:pPr>
-            <a:r>
-              <a:rPr sz="2100" b="0">
+              <a:defRPr sz="2200" b="0">
+                <a:solidFill>
+                  <a:srgbClr val="222222"/>
+                </a:solidFill>
+                <a:latin typeface="Calibri"/>
+              </a:defRPr>
+            </a:pPr>
+            <a:r>
+              <a:rPr sz="2200" b="0">
                 <a:solidFill>
                   <a:srgbClr val="222222"/>
                 </a:solidFill>
@@ -37941,15 +37941,15 @@
               <a:spcAft>
                 <a:spcPts val="800"/>
               </a:spcAft>
-              <a:defRPr sz="2100" b="0">
-                <a:solidFill>
-                  <a:srgbClr val="222222"/>
-                </a:solidFill>
-                <a:latin typeface="Calibri"/>
-              </a:defRPr>
-            </a:pPr>
-            <a:r>
-              <a:rPr sz="2100" b="0">
+              <a:defRPr sz="2200" b="0">
+                <a:solidFill>
+                  <a:srgbClr val="222222"/>
+                </a:solidFill>
+                <a:latin typeface="Calibri"/>
+              </a:defRPr>
+            </a:pPr>
+            <a:r>
+              <a:rPr sz="2200" b="0">
                 <a:solidFill>
                   <a:srgbClr val="222222"/>
                 </a:solidFill>
@@ -37966,15 +37966,15 @@
               <a:spcAft>
                 <a:spcPts val="800"/>
               </a:spcAft>
-              <a:defRPr sz="2100" b="0">
-                <a:solidFill>
-                  <a:srgbClr val="222222"/>
-                </a:solidFill>
-                <a:latin typeface="Calibri"/>
-              </a:defRPr>
-            </a:pPr>
-            <a:r>
-              <a:rPr sz="2100" b="0">
+              <a:defRPr sz="2200" b="0">
+                <a:solidFill>
+                  <a:srgbClr val="222222"/>
+                </a:solidFill>
+                <a:latin typeface="Calibri"/>
+              </a:defRPr>
+            </a:pPr>
+            <a:r>
+              <a:rPr sz="2200" b="0">
                 <a:solidFill>
                   <a:srgbClr val="222222"/>
                 </a:solidFill>
@@ -37991,15 +37991,15 @@
               <a:spcAft>
                 <a:spcPts val="800"/>
               </a:spcAft>
-              <a:defRPr sz="2100" b="0">
-                <a:solidFill>
-                  <a:srgbClr val="222222"/>
-                </a:solidFill>
-                <a:latin typeface="Calibri"/>
-              </a:defRPr>
-            </a:pPr>
-            <a:r>
-              <a:rPr sz="2100" b="0">
+              <a:defRPr sz="2200" b="0">
+                <a:solidFill>
+                  <a:srgbClr val="222222"/>
+                </a:solidFill>
+                <a:latin typeface="Calibri"/>
+              </a:defRPr>
+            </a:pPr>
+            <a:r>
+              <a:rPr sz="2200" b="0">
                 <a:solidFill>
                   <a:srgbClr val="222222"/>
                 </a:solidFill>
@@ -38018,8 +38018,8 @@
         </p:nvSpPr>
         <p:spPr>
           <a:xfrm>
-            <a:off x="6324447" y="1188720"/>
-            <a:ext cx="5364327" cy="457200"/>
+            <a:off x="6737088" y="1188720"/>
+            <a:ext cx="4951687" cy="457200"/>
           </a:xfrm>
           <a:prstGeom prst="rect">
             <a:avLst/>
@@ -38066,8 +38066,8 @@
         </p:nvSpPr>
         <p:spPr>
           <a:xfrm>
-            <a:off x="6324447" y="1700784"/>
-            <a:ext cx="5364327" cy="3474720"/>
+            <a:off x="6737088" y="1700784"/>
+            <a:ext cx="4951687" cy="3474720"/>
           </a:xfrm>
           <a:prstGeom prst="rect">
             <a:avLst/>

--- a/ground-vehicle/docs/courses/beginner-switch/l1_introduction.pptx
+++ b/ground-vehicle/docs/courses/beginner-switch/l1_introduction.pptx
@@ -32731,7 +32731,7 @@
                 </a:solidFill>
                 <a:latin typeface="Calibri"/>
               </a:rPr>
-              <a:t>About 20 minutes</a:t>
+              <a:t>About 15 minutes</a:t>
             </a:r>
           </a:p>
         </p:txBody>

--- a/ground-vehicle/docs/courses/beginner-switch/l1_introduction.pptx
+++ b/ground-vehicle/docs/courses/beginner-switch/l1_introduction.pptx
@@ -8663,7 +8663,7 @@
                 </a:solidFill>
                 <a:latin typeface="Calibri"/>
               </a:rPr>
-              <a:t>9</a:t>
+              <a:t>10</a:t>
             </a:r>
           </a:p>
         </p:txBody>
@@ -8939,7 +8939,7 @@
                 </a:solidFill>
                 <a:latin typeface="Calibri"/>
               </a:rPr>
-              <a:t>10</a:t>
+              <a:t>11</a:t>
             </a:r>
           </a:p>
         </p:txBody>
@@ -9263,7 +9263,7 @@
                 </a:solidFill>
                 <a:latin typeface="Calibri"/>
               </a:rPr>
-              <a:t>11</a:t>
+              <a:t>12</a:t>
             </a:r>
           </a:p>
         </p:txBody>
@@ -9539,7 +9539,7 @@
                 </a:solidFill>
                 <a:latin typeface="Calibri"/>
               </a:rPr>
-              <a:t>12</a:t>
+              <a:t>13</a:t>
             </a:r>
           </a:p>
         </p:txBody>
@@ -10030,7 +10030,7 @@
                 </a:solidFill>
                 <a:latin typeface="Calibri"/>
               </a:rPr>
-              <a:t>13</a:t>
+              <a:t>14</a:t>
             </a:r>
           </a:p>
         </p:txBody>
@@ -10642,7 +10642,7 @@
                 </a:solidFill>
                 <a:latin typeface="Calibri"/>
               </a:rPr>
-              <a:t>14</a:t>
+              <a:t>15</a:t>
             </a:r>
           </a:p>
         </p:txBody>
@@ -11133,7 +11133,7 @@
                 </a:solidFill>
                 <a:latin typeface="Calibri"/>
               </a:rPr>
-              <a:t>15</a:t>
+              <a:t>16</a:t>
             </a:r>
           </a:p>
         </p:txBody>
@@ -11770,7 +11770,7 @@
                 </a:solidFill>
                 <a:latin typeface="Calibri"/>
               </a:rPr>
-              <a:t>16</a:t>
+              <a:t>17</a:t>
             </a:r>
           </a:p>
         </p:txBody>
@@ -13008,7 +13008,7 @@
                 </a:solidFill>
                 <a:latin typeface="Calibri"/>
               </a:rPr>
-              <a:t>17</a:t>
+              <a:t>18</a:t>
             </a:r>
           </a:p>
         </p:txBody>
@@ -14760,7 +14760,7 @@
                 </a:solidFill>
                 <a:latin typeface="Calibri"/>
               </a:rPr>
-              <a:t>18</a:t>
+              <a:t>19</a:t>
             </a:r>
           </a:p>
         </p:txBody>
@@ -15131,7 +15131,7 @@
                 </a:solidFill>
                 <a:latin typeface="Calibri"/>
               </a:rPr>
-              <a:t>1</a:t>
+              <a:t>2</a:t>
             </a:r>
           </a:p>
         </p:txBody>
@@ -15581,7 +15581,7 @@
                 </a:solidFill>
                 <a:latin typeface="Calibri"/>
               </a:rPr>
-              <a:t>19</a:t>
+              <a:t>20</a:t>
             </a:r>
           </a:p>
         </p:txBody>
@@ -16152,7 +16152,7 @@
                 </a:solidFill>
                 <a:latin typeface="Calibri"/>
               </a:rPr>
-              <a:t>20</a:t>
+              <a:t>21</a:t>
             </a:r>
           </a:p>
         </p:txBody>
@@ -16524,7 +16524,7 @@
                 </a:solidFill>
                 <a:latin typeface="Calibri"/>
               </a:rPr>
-              <a:t>21</a:t>
+              <a:t>22</a:t>
             </a:r>
           </a:p>
         </p:txBody>
@@ -17314,7 +17314,7 @@
                 </a:solidFill>
                 <a:latin typeface="Calibri"/>
               </a:rPr>
-              <a:t>22</a:t>
+              <a:t>23</a:t>
             </a:r>
           </a:p>
         </p:txBody>
@@ -17773,7 +17773,7 @@
                 </a:solidFill>
                 <a:latin typeface="Calibri"/>
               </a:rPr>
-              <a:t>23</a:t>
+              <a:t>24</a:t>
             </a:r>
           </a:p>
         </p:txBody>
@@ -18410,7 +18410,7 @@
                 </a:solidFill>
                 <a:latin typeface="Calibri"/>
               </a:rPr>
-              <a:t>24</a:t>
+              <a:t>25</a:t>
             </a:r>
           </a:p>
         </p:txBody>
@@ -18885,7 +18885,7 @@
                 </a:solidFill>
                 <a:latin typeface="Calibri"/>
               </a:rPr>
-              <a:t>25</a:t>
+              <a:t>26</a:t>
             </a:r>
           </a:p>
         </p:txBody>
@@ -19310,7 +19310,7 @@
                 </a:solidFill>
                 <a:latin typeface="Calibri"/>
               </a:rPr>
-              <a:t>26</a:t>
+              <a:t>27</a:t>
             </a:r>
           </a:p>
         </p:txBody>
@@ -20539,7 +20539,7 @@
                 </a:solidFill>
                 <a:latin typeface="Calibri"/>
               </a:rPr>
-              <a:t>27</a:t>
+              <a:t>28</a:t>
             </a:r>
           </a:p>
         </p:txBody>
@@ -20997,7 +20997,7 @@
                 </a:solidFill>
                 <a:latin typeface="Calibri"/>
               </a:rPr>
-              <a:t>28</a:t>
+              <a:t>29</a:t>
             </a:r>
           </a:p>
         </p:txBody>
@@ -21835,7 +21835,7 @@
                 </a:solidFill>
                 <a:latin typeface="Calibri"/>
               </a:rPr>
-              <a:t>2</a:t>
+              <a:t>3</a:t>
             </a:r>
           </a:p>
         </p:txBody>
@@ -22253,7 +22253,7 @@
                 </a:solidFill>
                 <a:latin typeface="Calibri"/>
               </a:rPr>
-              <a:t>29</a:t>
+              <a:t>30</a:t>
             </a:r>
           </a:p>
         </p:txBody>
@@ -23428,7 +23428,7 @@
                 </a:solidFill>
                 <a:latin typeface="Calibri"/>
               </a:rPr>
-              <a:t>30</a:t>
+              <a:t>31</a:t>
             </a:r>
           </a:p>
         </p:txBody>
@@ -23910,7 +23910,7 @@
                 </a:solidFill>
                 <a:latin typeface="Calibri"/>
               </a:rPr>
-              <a:t>31</a:t>
+              <a:t>32</a:t>
             </a:r>
           </a:p>
         </p:txBody>
@@ -24372,7 +24372,7 @@
                 </a:solidFill>
                 <a:latin typeface="Calibri"/>
               </a:rPr>
-              <a:t>32</a:t>
+              <a:t>33</a:t>
             </a:r>
           </a:p>
         </p:txBody>
@@ -25989,7 +25989,7 @@
                 </a:solidFill>
                 <a:latin typeface="Calibri"/>
               </a:rPr>
-              <a:t>33</a:t>
+              <a:t>34</a:t>
             </a:r>
           </a:p>
         </p:txBody>
@@ -26451,7 +26451,7 @@
                 </a:solidFill>
                 <a:latin typeface="Calibri"/>
               </a:rPr>
-              <a:t>34</a:t>
+              <a:t>35</a:t>
             </a:r>
           </a:p>
         </p:txBody>
@@ -27068,7 +27068,7 @@
                 </a:solidFill>
                 <a:latin typeface="Calibri"/>
               </a:rPr>
-              <a:t>35</a:t>
+              <a:t>36</a:t>
             </a:r>
           </a:p>
         </p:txBody>
@@ -27796,7 +27796,7 @@
                 </a:solidFill>
                 <a:latin typeface="Calibri"/>
               </a:rPr>
-              <a:t>36</a:t>
+              <a:t>37</a:t>
             </a:r>
           </a:p>
         </p:txBody>
@@ -28464,7 +28464,7 @@
                 </a:solidFill>
                 <a:latin typeface="Calibri"/>
               </a:rPr>
-              <a:t>37</a:t>
+              <a:t>38</a:t>
             </a:r>
           </a:p>
         </p:txBody>
@@ -29350,7 +29350,7 @@
                 </a:solidFill>
                 <a:latin typeface="Calibri"/>
               </a:rPr>
-              <a:t>38</a:t>
+              <a:t>39</a:t>
             </a:r>
           </a:p>
         </p:txBody>
@@ -29850,7 +29850,7 @@
                 </a:solidFill>
                 <a:latin typeface="Calibri"/>
               </a:rPr>
-              <a:t>3</a:t>
+              <a:t>4</a:t>
             </a:r>
           </a:p>
         </p:txBody>
@@ -29865,7 +29865,7 @@
         </p:nvGraphicFramePr>
         <p:xfrm>
           <a:off x="502920" y="1188720"/>
-          <a:ext cx="11185853" cy="3314700"/>
+          <a:ext cx="11185854" cy="3886200"/>
         </p:xfrm>
         <a:graphic>
           <a:graphicData uri="http://schemas.openxmlformats.org/drawingml/2006/table">
@@ -29874,18 +29874,18 @@
                 <a:tableStyleId>{5C22544A-7EE6-4342-B048-85BDC9FD1C3A}</a:tableStyleId>
               </a:tblPr>
               <a:tblGrid>
-                <a:gridCol w="828581"/>
-                <a:gridCol w="4142909"/>
-                <a:gridCol w="6214363"/>
+                <a:gridCol w="1092200"/>
+                <a:gridCol w="4056220"/>
+                <a:gridCol w="6037434"/>
               </a:tblGrid>
-              <a:tr h="552450">
+              <a:tr h="647700">
                 <a:tc>
                   <a:txBody>
                     <a:bodyPr/>
                     <a:lstStyle/>
                     <a:p>
                       <a:r>
-                        <a:rPr sz="2250" b="1">
+                        <a:rPr sz="2400" b="1">
                           <a:solidFill>
                             <a:srgbClr val="FFFFFF"/>
                           </a:solidFill>
@@ -29907,7 +29907,7 @@
                     <a:lstStyle/>
                     <a:p>
                       <a:r>
-                        <a:rPr sz="2250" b="1">
+                        <a:rPr sz="2400" b="1">
                           <a:solidFill>
                             <a:srgbClr val="FFFFFF"/>
                           </a:solidFill>
@@ -29929,7 +29929,7 @@
                     <a:lstStyle/>
                     <a:p>
                       <a:r>
-                        <a:rPr sz="2250" b="1">
+                        <a:rPr sz="2400" b="1">
                           <a:solidFill>
                             <a:srgbClr val="FFFFFF"/>
                           </a:solidFill>
@@ -29946,14 +29946,14 @@
                   </a:tcPr>
                 </a:tc>
               </a:tr>
-              <a:tr h="552450">
+              <a:tr h="647700">
                 <a:tc>
                   <a:txBody>
                     <a:bodyPr/>
                     <a:lstStyle/>
                     <a:p>
                       <a:r>
-                        <a:rPr sz="2250">
+                        <a:rPr sz="2400">
                           <a:solidFill>
                             <a:srgbClr val="222222"/>
                           </a:solidFill>
@@ -29975,7 +29975,7 @@
                     <a:lstStyle/>
                     <a:p>
                       <a:r>
-                        <a:rPr sz="2250">
+                        <a:rPr sz="2400">
                           <a:solidFill>
                             <a:srgbClr val="222222"/>
                           </a:solidFill>
@@ -29997,7 +29997,7 @@
                     <a:lstStyle/>
                     <a:p>
                       <a:r>
-                        <a:rPr sz="2250">
+                        <a:rPr sz="2400">
                           <a:solidFill>
                             <a:srgbClr val="222222"/>
                           </a:solidFill>
@@ -30014,14 +30014,14 @@
                   </a:tcPr>
                 </a:tc>
               </a:tr>
-              <a:tr h="552450">
+              <a:tr h="647700">
                 <a:tc>
                   <a:txBody>
                     <a:bodyPr/>
                     <a:lstStyle/>
                     <a:p>
                       <a:r>
-                        <a:rPr sz="2250">
+                        <a:rPr sz="2400">
                           <a:solidFill>
                             <a:srgbClr val="222222"/>
                           </a:solidFill>
@@ -30043,7 +30043,7 @@
                     <a:lstStyle/>
                     <a:p>
                       <a:r>
-                        <a:rPr sz="2250">
+                        <a:rPr sz="2400">
                           <a:solidFill>
                             <a:srgbClr val="222222"/>
                           </a:solidFill>
@@ -30065,7 +30065,7 @@
                     <a:lstStyle/>
                     <a:p>
                       <a:r>
-                        <a:rPr sz="2250">
+                        <a:rPr sz="2400">
                           <a:solidFill>
                             <a:srgbClr val="222222"/>
                           </a:solidFill>
@@ -30082,14 +30082,14 @@
                   </a:tcPr>
                 </a:tc>
               </a:tr>
-              <a:tr h="552450">
+              <a:tr h="647700">
                 <a:tc>
                   <a:txBody>
                     <a:bodyPr/>
                     <a:lstStyle/>
                     <a:p>
                       <a:r>
-                        <a:rPr sz="2250">
+                        <a:rPr sz="2400">
                           <a:solidFill>
                             <a:srgbClr val="222222"/>
                           </a:solidFill>
@@ -30111,7 +30111,7 @@
                     <a:lstStyle/>
                     <a:p>
                       <a:r>
-                        <a:rPr sz="2250">
+                        <a:rPr sz="2400">
                           <a:solidFill>
                             <a:srgbClr val="222222"/>
                           </a:solidFill>
@@ -30133,7 +30133,7 @@
                     <a:lstStyle/>
                     <a:p>
                       <a:r>
-                        <a:rPr sz="2250">
+                        <a:rPr sz="2400">
                           <a:solidFill>
                             <a:srgbClr val="222222"/>
                           </a:solidFill>
@@ -30150,14 +30150,14 @@
                   </a:tcPr>
                 </a:tc>
               </a:tr>
-              <a:tr h="552450">
+              <a:tr h="647700">
                 <a:tc>
                   <a:txBody>
                     <a:bodyPr/>
                     <a:lstStyle/>
                     <a:p>
                       <a:r>
-                        <a:rPr sz="2250">
+                        <a:rPr sz="2400">
                           <a:solidFill>
                             <a:srgbClr val="222222"/>
                           </a:solidFill>
@@ -30179,7 +30179,7 @@
                     <a:lstStyle/>
                     <a:p>
                       <a:r>
-                        <a:rPr sz="2250">
+                        <a:rPr sz="2400">
                           <a:solidFill>
                             <a:srgbClr val="222222"/>
                           </a:solidFill>
@@ -30201,7 +30201,7 @@
                     <a:lstStyle/>
                     <a:p>
                       <a:r>
-                        <a:rPr sz="2250">
+                        <a:rPr sz="2400">
                           <a:solidFill>
                             <a:srgbClr val="222222"/>
                           </a:solidFill>
@@ -30218,14 +30218,14 @@
                   </a:tcPr>
                 </a:tc>
               </a:tr>
-              <a:tr h="552450">
+              <a:tr h="647700">
                 <a:tc>
                   <a:txBody>
                     <a:bodyPr/>
                     <a:lstStyle/>
                     <a:p>
                       <a:r>
-                        <a:rPr sz="2250">
+                        <a:rPr sz="2400">
                           <a:solidFill>
                             <a:srgbClr val="222222"/>
                           </a:solidFill>
@@ -30247,7 +30247,7 @@
                     <a:lstStyle/>
                     <a:p>
                       <a:r>
-                        <a:rPr sz="2250">
+                        <a:rPr sz="2400">
                           <a:solidFill>
                             <a:srgbClr val="222222"/>
                           </a:solidFill>
@@ -30269,7 +30269,7 @@
                     <a:lstStyle/>
                     <a:p>
                       <a:r>
-                        <a:rPr sz="2250">
+                        <a:rPr sz="2400">
                           <a:solidFill>
                             <a:srgbClr val="222222"/>
                           </a:solidFill>
@@ -30555,7 +30555,7 @@
                 </a:solidFill>
                 <a:latin typeface="Calibri"/>
               </a:rPr>
-              <a:t>39</a:t>
+              <a:t>40</a:t>
             </a:r>
           </a:p>
         </p:txBody>
@@ -31393,7 +31393,7 @@
                 </a:solidFill>
                 <a:latin typeface="Calibri"/>
               </a:rPr>
-              <a:t>40</a:t>
+              <a:t>41</a:t>
             </a:r>
           </a:p>
         </p:txBody>
@@ -32014,7 +32014,7 @@
                 </a:solidFill>
                 <a:latin typeface="Calibri"/>
               </a:rPr>
-              <a:t>41</a:t>
+              <a:t>42</a:t>
             </a:r>
           </a:p>
         </p:txBody>
@@ -32591,7 +32591,7 @@
                 </a:solidFill>
                 <a:latin typeface="Calibri"/>
               </a:rPr>
-              <a:t>42</a:t>
+              <a:t>43</a:t>
             </a:r>
           </a:p>
         </p:txBody>
@@ -33525,7 +33525,7 @@
                 </a:solidFill>
                 <a:latin typeface="Calibri"/>
               </a:rPr>
-              <a:t>43</a:t>
+              <a:t>44</a:t>
             </a:r>
           </a:p>
         </p:txBody>
@@ -33984,7 +33984,7 @@
                 </a:solidFill>
                 <a:latin typeface="Calibri"/>
               </a:rPr>
-              <a:t>44</a:t>
+              <a:t>45</a:t>
             </a:r>
           </a:p>
         </p:txBody>
@@ -34891,7 +34891,7 @@
                 </a:solidFill>
                 <a:latin typeface="Calibri"/>
               </a:rPr>
-              <a:t>45</a:t>
+              <a:t>46</a:t>
             </a:r>
           </a:p>
         </p:txBody>
@@ -35533,7 +35533,7 @@
                 </a:solidFill>
                 <a:latin typeface="Calibri"/>
               </a:rPr>
-              <a:t>46</a:t>
+              <a:t>47</a:t>
             </a:r>
           </a:p>
         </p:txBody>
@@ -36001,7 +36001,7 @@
                 </a:solidFill>
                 <a:latin typeface="Calibri"/>
               </a:rPr>
-              <a:t>47</a:t>
+              <a:t>48</a:t>
             </a:r>
           </a:p>
         </p:txBody>
@@ -36426,7 +36426,7 @@
                 </a:solidFill>
                 <a:latin typeface="Calibri"/>
               </a:rPr>
-              <a:t>4</a:t>
+              <a:t>5</a:t>
             </a:r>
           </a:p>
         </p:txBody>
@@ -37116,7 +37116,7 @@
                 </a:solidFill>
                 <a:latin typeface="Calibri"/>
               </a:rPr>
-              <a:t>5</a:t>
+              <a:t>6</a:t>
             </a:r>
           </a:p>
         </p:txBody>
@@ -37515,7 +37515,7 @@
                 </a:solidFill>
                 <a:latin typeface="Calibri"/>
               </a:rPr>
-              <a:t>6</a:t>
+              <a:t>7</a:t>
             </a:r>
           </a:p>
         </p:txBody>
@@ -38252,7 +38252,7 @@
                 </a:solidFill>
                 <a:latin typeface="Calibri"/>
               </a:rPr>
-              <a:t>7</a:t>
+              <a:t>8</a:t>
             </a:r>
           </a:p>
         </p:txBody>
@@ -38838,7 +38838,7 @@
                 </a:solidFill>
                 <a:latin typeface="Calibri"/>
               </a:rPr>
-              <a:t>8</a:t>
+              <a:t>9</a:t>
             </a:r>
           </a:p>
         </p:txBody>

--- a/ground-vehicle/docs/courses/beginner-switch/l1_introduction.pptx
+++ b/ground-vehicle/docs/courses/beginner-switch/l1_introduction.pptx
@@ -2364,6 +2364,14 @@
                 <a:latin typeface="Calibri"/>
               </a:rPr>
               <a:t>This is the reference page. Tell students to photograph it.</a:t>
+            </a:r>
+          </a:p>
+          <a:p>
+            <a:r>
+              <a:rPr sz="1200">
+                <a:latin typeface="Calibri"/>
+              </a:rPr>
+              <a:t>The sketches are grouped by lesson because they need the same things. The one row worth pointing at is l1c_first_pixel: Lesson 1 is the only lesson where the three sketches do not all need the same library.</a:t>
             </a:r>
           </a:p>
           <a:p>
@@ -10432,7 +10440,7 @@
               <a:t>KEY POINT   </a:t>
             </a:r>
             <a:r>
-              <a:rPr sz="1500">
+              <a:rPr sz="1800">
                 <a:solidFill>
                   <a:srgbClr val="222222"/>
                 </a:solidFill>
@@ -11560,7 +11568,7 @@
               <a:t>KEY POINT   </a:t>
             </a:r>
             <a:r>
-              <a:rPr sz="1500">
+              <a:rPr sz="1800">
                 <a:solidFill>
                   <a:srgbClr val="222222"/>
                 </a:solidFill>
@@ -12798,7 +12806,7 @@
               <a:t>KEY POINT   </a:t>
             </a:r>
             <a:r>
-              <a:rPr sz="1500">
+              <a:rPr sz="1800">
                 <a:solidFill>
                   <a:srgbClr val="222222"/>
                 </a:solidFill>
@@ -16404,7 +16412,7 @@
               <a:t>KEY POINT   </a:t>
             </a:r>
             <a:r>
-              <a:rPr sz="1500">
+              <a:rPr sz="1800">
                 <a:solidFill>
                   <a:srgbClr val="222222"/>
                 </a:solidFill>
@@ -17563,7 +17571,7 @@
               <a:t>KEY POINT   </a:t>
             </a:r>
             <a:r>
-              <a:rPr sz="1500">
+              <a:rPr sz="1800">
                 <a:solidFill>
                   <a:srgbClr val="222222"/>
                 </a:solidFill>
@@ -18200,7 +18208,7 @@
               <a:t>WATCH OUT   </a:t>
             </a:r>
             <a:r>
-              <a:rPr sz="1500">
+              <a:rPr sz="1800">
                 <a:solidFill>
                   <a:srgbClr val="222222"/>
                 </a:solidFill>
@@ -18675,7 +18683,7 @@
               <a:t>WATCH OUT   </a:t>
             </a:r>
             <a:r>
-              <a:rPr sz="1500">
+              <a:rPr sz="1800">
                 <a:solidFill>
                   <a:srgbClr val="222222"/>
                 </a:solidFill>
@@ -19100,7 +19108,7 @@
               <a:t>KEY POINT   </a:t>
             </a:r>
             <a:r>
-              <a:rPr sz="1500">
+              <a:rPr sz="1800">
                 <a:solidFill>
                   <a:srgbClr val="222222"/>
                 </a:solidFill>
@@ -19373,7 +19381,7 @@
         </p:nvGraphicFramePr>
         <p:xfrm>
           <a:off x="502920" y="1691640"/>
-          <a:ext cx="11185853" cy="3363912"/>
+          <a:ext cx="11185853" cy="3149600"/>
         </p:xfrm>
         <a:graphic>
           <a:graphicData uri="http://schemas.openxmlformats.org/drawingml/2006/table">
@@ -19386,14 +19394,14 @@
                 <a:gridCol w="4026907"/>
                 <a:gridCol w="6040361"/>
               </a:tblGrid>
-              <a:tr h="258762">
+              <a:tr h="393700">
                 <a:tc>
                   <a:txBody>
                     <a:bodyPr/>
                     <a:lstStyle/>
                     <a:p>
                       <a:r>
-                        <a:rPr sz="1150" b="1">
+                        <a:rPr sz="2000" b="1">
                           <a:solidFill>
                             <a:srgbClr val="FFFFFF"/>
                           </a:solidFill>
@@ -19415,7 +19423,7 @@
                     <a:lstStyle/>
                     <a:p>
                       <a:r>
-                        <a:rPr sz="1150" b="1">
+                        <a:rPr sz="2000" b="1">
                           <a:solidFill>
                             <a:srgbClr val="FFFFFF"/>
                           </a:solidFill>
@@ -19437,7 +19445,7 @@
                     <a:lstStyle/>
                     <a:p>
                       <a:r>
-                        <a:rPr sz="1150" b="1">
+                        <a:rPr sz="2000" b="1">
                           <a:solidFill>
                             <a:srgbClr val="FFFFFF"/>
                           </a:solidFill>
@@ -19454,14 +19462,14 @@
                   </a:tcPr>
                 </a:tc>
               </a:tr>
-              <a:tr h="258762">
+              <a:tr h="393700">
                 <a:tc>
                   <a:txBody>
                     <a:bodyPr/>
                     <a:lstStyle/>
                     <a:p>
                       <a:r>
-                        <a:rPr sz="1150">
+                        <a:rPr sz="2000">
                           <a:solidFill>
                             <a:srgbClr val="222222"/>
                           </a:solidFill>
@@ -19483,13 +19491,13 @@
                     <a:lstStyle/>
                     <a:p>
                       <a:r>
-                        <a:rPr sz="1150">
+                        <a:rPr sz="2000">
                           <a:solidFill>
                             <a:srgbClr val="222222"/>
                           </a:solidFill>
                           <a:latin typeface="Calibri"/>
                         </a:rPr>
-                        <a:t>l1a_blink</a:t>
+                        <a:t>l1a_blink / l1b_serial_monitor</a:t>
                       </a:r>
                     </a:p>
                   </a:txBody>
@@ -19505,7 +19513,7 @@
                     <a:lstStyle/>
                     <a:p>
                       <a:r>
-                        <a:rPr sz="1150">
+                        <a:rPr sz="2000">
                           <a:solidFill>
                             <a:srgbClr val="222222"/>
                           </a:solidFill>
@@ -19522,14 +19530,14 @@
                   </a:tcPr>
                 </a:tc>
               </a:tr>
-              <a:tr h="258762">
+              <a:tr h="393700">
                 <a:tc>
                   <a:txBody>
                     <a:bodyPr/>
                     <a:lstStyle/>
                     <a:p>
                       <a:r>
-                        <a:rPr sz="1150">
+                        <a:rPr sz="2000">
                           <a:solidFill>
                             <a:srgbClr val="222222"/>
                           </a:solidFill>
@@ -19551,13 +19559,13 @@
                     <a:lstStyle/>
                     <a:p>
                       <a:r>
-                        <a:rPr sz="1150">
+                        <a:rPr sz="2000">
                           <a:solidFill>
                             <a:srgbClr val="222222"/>
                           </a:solidFill>
                           <a:latin typeface="Calibri"/>
                         </a:rPr>
-                        <a:t>l1b_serial_monitor</a:t>
+                        <a:t>l1c_first_pixel</a:t>
                       </a:r>
                     </a:p>
                   </a:txBody>
@@ -19573,75 +19581,7 @@
                     <a:lstStyle/>
                     <a:p>
                       <a:r>
-                        <a:rPr sz="1150">
-                          <a:solidFill>
-                            <a:srgbClr val="222222"/>
-                          </a:solidFill>
-                          <a:latin typeface="Calibri"/>
-                        </a:rPr>
-                        <a:t>none</a:t>
-                      </a:r>
-                    </a:p>
-                  </a:txBody>
-                  <a:tcPr marL="73152" marT="18288" marB="18288">
-                    <a:solidFill>
-                      <a:srgbClr val="EEF3F8"/>
-                    </a:solidFill>
-                  </a:tcPr>
-                </a:tc>
-              </a:tr>
-              <a:tr h="258762">
-                <a:tc>
-                  <a:txBody>
-                    <a:bodyPr/>
-                    <a:lstStyle/>
-                    <a:p>
-                      <a:r>
-                        <a:rPr sz="1150">
-                          <a:solidFill>
-                            <a:srgbClr val="222222"/>
-                          </a:solidFill>
-                          <a:latin typeface="Calibri"/>
-                        </a:rPr>
-                        <a:t>1</a:t>
-                      </a:r>
-                    </a:p>
-                  </a:txBody>
-                  <a:tcPr marL="73152" marT="18288" marB="18288">
-                    <a:solidFill>
-                      <a:srgbClr val="FFFFFF"/>
-                    </a:solidFill>
-                  </a:tcPr>
-                </a:tc>
-                <a:tc>
-                  <a:txBody>
-                    <a:bodyPr/>
-                    <a:lstStyle/>
-                    <a:p>
-                      <a:r>
-                        <a:rPr sz="1150">
-                          <a:solidFill>
-                            <a:srgbClr val="222222"/>
-                          </a:solidFill>
-                          <a:latin typeface="Calibri"/>
-                        </a:rPr>
-                        <a:t>l1c_first_pixel</a:t>
-                      </a:r>
-                    </a:p>
-                  </a:txBody>
-                  <a:tcPr marL="73152" marT="18288" marB="18288">
-                    <a:solidFill>
-                      <a:srgbClr val="FFFFFF"/>
-                    </a:solidFill>
-                  </a:tcPr>
-                </a:tc>
-                <a:tc>
-                  <a:txBody>
-                    <a:bodyPr/>
-                    <a:lstStyle/>
-                    <a:p>
-                      <a:r>
-                        <a:rPr sz="1150">
+                        <a:rPr sz="2000">
                           <a:solidFill>
                             <a:srgbClr val="222222"/>
                           </a:solidFill>
@@ -19653,87 +19593,19 @@
                   </a:txBody>
                   <a:tcPr marL="73152" marT="18288" marB="18288">
                     <a:solidFill>
-                      <a:srgbClr val="FFFFFF"/>
+                      <a:srgbClr val="EEF3F8"/>
                     </a:solidFill>
                   </a:tcPr>
                 </a:tc>
               </a:tr>
-              <a:tr h="258762">
+              <a:tr h="393700">
                 <a:tc>
                   <a:txBody>
                     <a:bodyPr/>
                     <a:lstStyle/>
                     <a:p>
                       <a:r>
-                        <a:rPr sz="1150">
-                          <a:solidFill>
-                            <a:srgbClr val="222222"/>
-                          </a:solidFill>
-                          <a:latin typeface="Calibri"/>
-                        </a:rPr>
-                        <a:t>2</a:t>
-                      </a:r>
-                    </a:p>
-                  </a:txBody>
-                  <a:tcPr marL="73152" marT="18288" marB="18288">
-                    <a:solidFill>
-                      <a:srgbClr val="EEF3F8"/>
-                    </a:solidFill>
-                  </a:tcPr>
-                </a:tc>
-                <a:tc>
-                  <a:txBody>
-                    <a:bodyPr/>
-                    <a:lstStyle/>
-                    <a:p>
-                      <a:r>
-                        <a:rPr sz="1150">
-                          <a:solidFill>
-                            <a:srgbClr val="222222"/>
-                          </a:solidFill>
-                          <a:latin typeface="Calibri"/>
-                        </a:rPr>
-                        <a:t>l2a_one_motor</a:t>
-                      </a:r>
-                    </a:p>
-                  </a:txBody>
-                  <a:tcPr marL="73152" marT="18288" marB="18288">
-                    <a:solidFill>
-                      <a:srgbClr val="EEF3F8"/>
-                    </a:solidFill>
-                  </a:tcPr>
-                </a:tc>
-                <a:tc>
-                  <a:txBody>
-                    <a:bodyPr/>
-                    <a:lstStyle/>
-                    <a:p>
-                      <a:r>
-                        <a:rPr sz="1150">
-                          <a:solidFill>
-                            <a:srgbClr val="222222"/>
-                          </a:solidFill>
-                          <a:latin typeface="Calibri"/>
-                        </a:rPr>
-                        <a:t>none</a:t>
-                      </a:r>
-                    </a:p>
-                  </a:txBody>
-                  <a:tcPr marL="73152" marT="18288" marB="18288">
-                    <a:solidFill>
-                      <a:srgbClr val="EEF3F8"/>
-                    </a:solidFill>
-                  </a:tcPr>
-                </a:tc>
-              </a:tr>
-              <a:tr h="258762">
-                <a:tc>
-                  <a:txBody>
-                    <a:bodyPr/>
-                    <a:lstStyle/>
-                    <a:p>
-                      <a:r>
-                        <a:rPr sz="1150">
+                        <a:rPr sz="2000">
                           <a:solidFill>
                             <a:srgbClr val="222222"/>
                           </a:solidFill>
@@ -19755,13 +19627,13 @@
                     <a:lstStyle/>
                     <a:p>
                       <a:r>
-                        <a:rPr sz="1150">
+                        <a:rPr sz="2000">
                           <a:solidFill>
                             <a:srgbClr val="222222"/>
                           </a:solidFill>
                           <a:latin typeface="Calibri"/>
                         </a:rPr>
-                        <a:t>l2b_speed_ramp</a:t>
+                        <a:t>l2a / l2b / l2c</a:t>
                       </a:r>
                     </a:p>
                   </a:txBody>
@@ -19777,7 +19649,7 @@
                     <a:lstStyle/>
                     <a:p>
                       <a:r>
-                        <a:rPr sz="1150">
+                        <a:rPr sz="2000">
                           <a:solidFill>
                             <a:srgbClr val="222222"/>
                           </a:solidFill>
@@ -19794,150 +19666,14 @@
                   </a:tcPr>
                 </a:tc>
               </a:tr>
-              <a:tr h="258762">
+              <a:tr h="393700">
                 <a:tc>
                   <a:txBody>
                     <a:bodyPr/>
                     <a:lstStyle/>
                     <a:p>
                       <a:r>
-                        <a:rPr sz="1150">
-                          <a:solidFill>
-                            <a:srgbClr val="222222"/>
-                          </a:solidFill>
-                          <a:latin typeface="Calibri"/>
-                        </a:rPr>
-                        <a:t>2</a:t>
-                      </a:r>
-                    </a:p>
-                  </a:txBody>
-                  <a:tcPr marL="73152" marT="18288" marB="18288">
-                    <a:solidFill>
-                      <a:srgbClr val="EEF3F8"/>
-                    </a:solidFill>
-                  </a:tcPr>
-                </a:tc>
-                <a:tc>
-                  <a:txBody>
-                    <a:bodyPr/>
-                    <a:lstStyle/>
-                    <a:p>
-                      <a:r>
-                        <a:rPr sz="1150">
-                          <a:solidFill>
-                            <a:srgbClr val="222222"/>
-                          </a:solidFill>
-                          <a:latin typeface="Calibri"/>
-                        </a:rPr>
-                        <a:t>l2c_maneuver_square</a:t>
-                      </a:r>
-                    </a:p>
-                  </a:txBody>
-                  <a:tcPr marL="73152" marT="18288" marB="18288">
-                    <a:solidFill>
-                      <a:srgbClr val="EEF3F8"/>
-                    </a:solidFill>
-                  </a:tcPr>
-                </a:tc>
-                <a:tc>
-                  <a:txBody>
-                    <a:bodyPr/>
-                    <a:lstStyle/>
-                    <a:p>
-                      <a:r>
-                        <a:rPr sz="1150">
-                          <a:solidFill>
-                            <a:srgbClr val="222222"/>
-                          </a:solidFill>
-                          <a:latin typeface="Calibri"/>
-                        </a:rPr>
-                        <a:t>none</a:t>
-                      </a:r>
-                    </a:p>
-                  </a:txBody>
-                  <a:tcPr marL="73152" marT="18288" marB="18288">
-                    <a:solidFill>
-                      <a:srgbClr val="EEF3F8"/>
-                    </a:solidFill>
-                  </a:tcPr>
-                </a:tc>
-              </a:tr>
-              <a:tr h="258762">
-                <a:tc>
-                  <a:txBody>
-                    <a:bodyPr/>
-                    <a:lstStyle/>
-                    <a:p>
-                      <a:r>
-                        <a:rPr sz="1150">
-                          <a:solidFill>
-                            <a:srgbClr val="222222"/>
-                          </a:solidFill>
-                          <a:latin typeface="Calibri"/>
-                        </a:rPr>
-                        <a:t>3</a:t>
-                      </a:r>
-                    </a:p>
-                  </a:txBody>
-                  <a:tcPr marL="73152" marT="18288" marB="18288">
-                    <a:solidFill>
-                      <a:srgbClr val="FFFFFF"/>
-                    </a:solidFill>
-                  </a:tcPr>
-                </a:tc>
-                <a:tc>
-                  <a:txBody>
-                    <a:bodyPr/>
-                    <a:lstStyle/>
-                    <a:p>
-                      <a:r>
-                        <a:rPr sz="1150">
-                          <a:solidFill>
-                            <a:srgbClr val="222222"/>
-                          </a:solidFill>
-                          <a:latin typeface="Calibri"/>
-                        </a:rPr>
-                        <a:t>l3a_controller_check</a:t>
-                      </a:r>
-                    </a:p>
-                  </a:txBody>
-                  <a:tcPr marL="73152" marT="18288" marB="18288">
-                    <a:solidFill>
-                      <a:srgbClr val="FFFFFF"/>
-                    </a:solidFill>
-                  </a:tcPr>
-                </a:tc>
-                <a:tc>
-                  <a:txBody>
-                    <a:bodyPr/>
-                    <a:lstStyle/>
-                    <a:p>
-                      <a:r>
-                        <a:rPr sz="1150">
-                          <a:solidFill>
-                            <a:srgbClr val="222222"/>
-                          </a:solidFill>
-                          <a:latin typeface="Calibri"/>
-                        </a:rPr>
-                        <a:t>none (Bluepad32 ships with the board package)</a:t>
-                      </a:r>
-                    </a:p>
-                  </a:txBody>
-                  <a:tcPr marL="73152" marT="18288" marB="18288">
-                    <a:solidFill>
-                      <a:srgbClr val="FFFFFF"/>
-                    </a:solidFill>
-                  </a:tcPr>
-                </a:tc>
-              </a:tr>
-              <a:tr h="258762">
-                <a:tc>
-                  <a:txBody>
-                    <a:bodyPr/>
-                    <a:lstStyle/>
-                    <a:p>
-                      <a:r>
-                        <a:rPr sz="1150">
+                        <a:rPr sz="2000">
                           <a:solidFill>
                             <a:srgbClr val="222222"/>
                           </a:solidFill>
@@ -19959,13 +19695,13 @@
                     <a:lstStyle/>
                     <a:p>
                       <a:r>
-                        <a:rPr sz="1150">
+                        <a:rPr sz="2000">
                           <a:solidFill>
                             <a:srgbClr val="222222"/>
                           </a:solidFill>
                           <a:latin typeface="Calibri"/>
                         </a:rPr>
-                        <a:t>l3b_deadzone_and_map</a:t>
+                        <a:t>l3a / l3b / l3c</a:t>
                       </a:r>
                     </a:p>
                   </a:txBody>
@@ -19981,7 +19717,7 @@
                     <a:lstStyle/>
                     <a:p>
                       <a:r>
-                        <a:rPr sz="1150">
+                        <a:rPr sz="2000">
                           <a:solidFill>
                             <a:srgbClr val="222222"/>
                           </a:solidFill>
@@ -19998,20 +19734,20 @@
                   </a:tcPr>
                 </a:tc>
               </a:tr>
-              <a:tr h="258762">
+              <a:tr h="393700">
                 <a:tc>
                   <a:txBody>
                     <a:bodyPr/>
                     <a:lstStyle/>
                     <a:p>
                       <a:r>
-                        <a:rPr sz="1150">
+                        <a:rPr sz="2000">
                           <a:solidFill>
                             <a:srgbClr val="222222"/>
                           </a:solidFill>
                           <a:latin typeface="Calibri"/>
                         </a:rPr>
-                        <a:t>3</a:t>
+                        <a:t>4</a:t>
                       </a:r>
                     </a:p>
                   </a:txBody>
@@ -20027,13 +19763,13 @@
                     <a:lstStyle/>
                     <a:p>
                       <a:r>
-                        <a:rPr sz="1150">
+                        <a:rPr sz="2000">
                           <a:solidFill>
                             <a:srgbClr val="222222"/>
                           </a:solidFill>
                           <a:latin typeface="Calibri"/>
                         </a:rPr>
-                        <a:t>l3c_tank_drive</a:t>
+                        <a:t>l4a / l4b / l4c</a:t>
                       </a:r>
                     </a:p>
                   </a:txBody>
@@ -20049,13 +19785,13 @@
                     <a:lstStyle/>
                     <a:p>
                       <a:r>
-                        <a:rPr sz="1150">
+                        <a:rPr sz="2000">
                           <a:solidFill>
                             <a:srgbClr val="222222"/>
                           </a:solidFill>
                           <a:latin typeface="Calibri"/>
                         </a:rPr>
-                        <a:t>none (Bluepad32 ships with the board package)</a:t>
+                        <a:t>Adafruit NeoPixel</a:t>
                       </a:r>
                     </a:p>
                   </a:txBody>
@@ -20066,20 +19802,20 @@
                   </a:tcPr>
                 </a:tc>
               </a:tr>
-              <a:tr h="258762">
+              <a:tr h="393700">
                 <a:tc>
                   <a:txBody>
                     <a:bodyPr/>
                     <a:lstStyle/>
                     <a:p>
                       <a:r>
-                        <a:rPr sz="1150">
+                        <a:rPr sz="2000">
                           <a:solidFill>
                             <a:srgbClr val="222222"/>
                           </a:solidFill>
                           <a:latin typeface="Calibri"/>
                         </a:rPr>
-                        <a:t>4</a:t>
+                        <a:t>5</a:t>
                       </a:r>
                     </a:p>
                   </a:txBody>
@@ -20095,13 +19831,13 @@
                     <a:lstStyle/>
                     <a:p>
                       <a:r>
-                        <a:rPr sz="1150">
+                        <a:rPr sz="2000">
                           <a:solidFill>
                             <a:srgbClr val="222222"/>
                           </a:solidFill>
                           <a:latin typeface="Calibri"/>
                         </a:rPr>
-                        <a:t>l4a / l4b / l4c</a:t>
+                        <a:t>l5a / l5b / l5c</a:t>
                       </a:r>
                     </a:p>
                   </a:txBody>
@@ -20117,7 +19853,7 @@
                     <a:lstStyle/>
                     <a:p>
                       <a:r>
-                        <a:rPr sz="1150">
+                        <a:rPr sz="2000">
                           <a:solidFill>
                             <a:srgbClr val="222222"/>
                           </a:solidFill>
@@ -20134,14 +19870,14 @@
                   </a:tcPr>
                 </a:tc>
               </a:tr>
-              <a:tr h="258762">
+              <a:tr h="393700">
                 <a:tc>
                   <a:txBody>
                     <a:bodyPr/>
                     <a:lstStyle/>
                     <a:p>
                       <a:r>
-                        <a:rPr sz="1150">
+                        <a:rPr sz="2000">
                           <a:solidFill>
                             <a:srgbClr val="222222"/>
                           </a:solidFill>
@@ -20163,13 +19899,13 @@
                     <a:lstStyle/>
                     <a:p>
                       <a:r>
-                        <a:rPr sz="1150">
+                        <a:rPr sz="2000">
                           <a:solidFill>
                             <a:srgbClr val="222222"/>
                           </a:solidFill>
                           <a:latin typeface="Calibri"/>
                         </a:rPr>
-                        <a:t>l5a / l5b / l5c</a:t>
+                        <a:t>pathfinder_nintendoswitch</a:t>
                       </a:r>
                     </a:p>
                   </a:txBody>
@@ -20185,7 +19921,7 @@
                     <a:lstStyle/>
                     <a:p>
                       <a:r>
-                        <a:rPr sz="1150">
+                        <a:rPr sz="2000">
                           <a:solidFill>
                             <a:srgbClr val="222222"/>
                           </a:solidFill>
@@ -20202,74 +19938,6 @@
                   </a:tcPr>
                 </a:tc>
               </a:tr>
-              <a:tr h="258768">
-                <a:tc>
-                  <a:txBody>
-                    <a:bodyPr/>
-                    <a:lstStyle/>
-                    <a:p>
-                      <a:r>
-                        <a:rPr sz="1150">
-                          <a:solidFill>
-                            <a:srgbClr val="222222"/>
-                          </a:solidFill>
-                          <a:latin typeface="Calibri"/>
-                        </a:rPr>
-                        <a:t>5</a:t>
-                      </a:r>
-                    </a:p>
-                  </a:txBody>
-                  <a:tcPr marL="73152" marT="18288" marB="18288">
-                    <a:solidFill>
-                      <a:srgbClr val="EEF3F8"/>
-                    </a:solidFill>
-                  </a:tcPr>
-                </a:tc>
-                <a:tc>
-                  <a:txBody>
-                    <a:bodyPr/>
-                    <a:lstStyle/>
-                    <a:p>
-                      <a:r>
-                        <a:rPr sz="1150">
-                          <a:solidFill>
-                            <a:srgbClr val="222222"/>
-                          </a:solidFill>
-                          <a:latin typeface="Calibri"/>
-                        </a:rPr>
-                        <a:t>pathfinder_nintendoswitch</a:t>
-                      </a:r>
-                    </a:p>
-                  </a:txBody>
-                  <a:tcPr marL="73152" marT="18288" marB="18288">
-                    <a:solidFill>
-                      <a:srgbClr val="EEF3F8"/>
-                    </a:solidFill>
-                  </a:tcPr>
-                </a:tc>
-                <a:tc>
-                  <a:txBody>
-                    <a:bodyPr/>
-                    <a:lstStyle/>
-                    <a:p>
-                      <a:r>
-                        <a:rPr sz="1150">
-                          <a:solidFill>
-                            <a:srgbClr val="222222"/>
-                          </a:solidFill>
-                          <a:latin typeface="Calibri"/>
-                        </a:rPr>
-                        <a:t>Adafruit NeoPixel</a:t>
-                      </a:r>
-                    </a:p>
-                  </a:txBody>
-                  <a:tcPr marL="73152" marT="18288" marB="18288">
-                    <a:solidFill>
-                      <a:srgbClr val="EEF3F8"/>
-                    </a:solidFill>
-                  </a:tcPr>
-                </a:tc>
-              </a:tr>
             </a:tbl>
           </a:graphicData>
         </a:graphic>
@@ -20329,7 +19997,7 @@
               <a:t>KEY POINT   </a:t>
             </a:r>
             <a:r>
-              <a:rPr sz="1500">
+              <a:rPr sz="1800">
                 <a:solidFill>
                   <a:srgbClr val="222222"/>
                 </a:solidFill>
@@ -20877,7 +20545,7 @@
               <a:t>WATCH OUT   </a:t>
             </a:r>
             <a:r>
-              <a:rPr sz="1500">
+              <a:rPr sz="1800">
                 <a:solidFill>
                   <a:srgbClr val="222222"/>
                 </a:solidFill>
@@ -22043,7 +21711,7 @@
               <a:t>KEY POINT   </a:t>
             </a:r>
             <a:r>
-              <a:rPr sz="1500">
+              <a:rPr sz="1800">
                 <a:solidFill>
                   <a:srgbClr val="222222"/>
                 </a:solidFill>
@@ -23218,7 +22886,7 @@
               <a:t>KEY POINT   </a:t>
             </a:r>
             <a:r>
-              <a:rPr sz="1500">
+              <a:rPr sz="1800">
                 <a:solidFill>
                   <a:srgbClr val="222222"/>
                 </a:solidFill>
@@ -24162,7 +23830,7 @@
               <a:t>KEY POINT   </a:t>
             </a:r>
             <a:r>
-              <a:rPr sz="1500">
+              <a:rPr sz="1800">
                 <a:solidFill>
                   <a:srgbClr val="222222"/>
                 </a:solidFill>
@@ -25779,7 +25447,7 @@
               <a:t>WATCH OUT   </a:t>
             </a:r>
             <a:r>
-              <a:rPr sz="1500">
+              <a:rPr sz="1800">
                 <a:solidFill>
                   <a:srgbClr val="222222"/>
                 </a:solidFill>
@@ -26241,7 +25909,7 @@
               <a:t>WATCH OUT   </a:t>
             </a:r>
             <a:r>
-              <a:rPr sz="1500">
+              <a:rPr sz="1800">
                 <a:solidFill>
                   <a:srgbClr val="222222"/>
                 </a:solidFill>
@@ -26858,7 +26526,7 @@
               <a:t>KEY POINT   </a:t>
             </a:r>
             <a:r>
-              <a:rPr sz="1500">
+              <a:rPr sz="1800">
                 <a:solidFill>
                   <a:srgbClr val="222222"/>
                 </a:solidFill>
@@ -29640,7 +29308,7 @@
               <a:t>KEY POINT   </a:t>
             </a:r>
             <a:r>
-              <a:rPr sz="1500">
+              <a:rPr sz="1800">
                 <a:solidFill>
                   <a:srgbClr val="222222"/>
                 </a:solidFill>
@@ -30345,7 +30013,7 @@
               <a:t>KEY POINT   </a:t>
             </a:r>
             <a:r>
-              <a:rPr sz="1500">
+              <a:rPr sz="1800">
                 <a:solidFill>
                   <a:srgbClr val="222222"/>
                 </a:solidFill>
@@ -31183,7 +30851,7 @@
               <a:t>KEY POINT   </a:t>
             </a:r>
             <a:r>
-              <a:rPr sz="1500">
+              <a:rPr sz="1800">
                 <a:solidFill>
                   <a:srgbClr val="222222"/>
                 </a:solidFill>
@@ -33774,7 +33442,7 @@
               <a:t>WATCH OUT   </a:t>
             </a:r>
             <a:r>
-              <a:rPr sz="1500">
+              <a:rPr sz="1800">
                 <a:solidFill>
                   <a:srgbClr val="222222"/>
                 </a:solidFill>
@@ -35791,7 +35459,7 @@
               <a:t>SAFETY   </a:t>
             </a:r>
             <a:r>
-              <a:rPr sz="1500">
+              <a:rPr sz="1800">
                 <a:solidFill>
                   <a:srgbClr val="222222"/>
                 </a:solidFill>
@@ -38042,7 +37710,7 @@
               <a:t>KEY POINT   </a:t>
             </a:r>
             <a:r>
-              <a:rPr sz="1500">
+              <a:rPr sz="1800">
                 <a:solidFill>
                   <a:srgbClr val="222222"/>
                 </a:solidFill>
@@ -39071,7 +38739,7 @@
               <a:t>KEY POINT   </a:t>
             </a:r>
             <a:r>
-              <a:rPr sz="1500">
+              <a:rPr sz="1800">
                 <a:solidFill>
                   <a:srgbClr val="222222"/>
                 </a:solidFill>

--- a/ground-vehicle/docs/courses/beginner-switch/l1_introduction.pptx
+++ b/ground-vehicle/docs/courses/beginner-switch/l1_introduction.pptx
@@ -4838,7 +4838,7 @@
               <a:rPr sz="1200">
                 <a:latin typeface="Calibri"/>
               </a:rPr>
-              <a:t>Point out that each indicator lights the front bar and the rear bar on that side, the way a car does. It is one side of the vehicle, seen front and back, not one end of it.</a:t>
+              <a:t>Both photographs are taken from the front, so you can only see the front bar. Say what the camera cannot show: the rear bar is indicating on the same side at the same time, the way a car does. It is one SIDE of the vehicle lighting up, not one end.</a:t>
             </a:r>
           </a:p>
           <a:p>
@@ -8402,7 +8402,7 @@
       </p:sp>
       <p:pic>
         <p:nvPicPr>
-          <p:cNvPr id="8" name="Picture 7" descr="vehicle-front-blue-leds.jpg"/>
+          <p:cNvPr id="8" name="Picture 7" descr="vehicle-turn-signal-left.jpg"/>
           <p:cNvPicPr>
             <a:picLocks noChangeAspect="1"/>
           </p:cNvPicPr>
@@ -37973,128 +37973,57 @@
           </a:p>
         </p:txBody>
       </p:sp>
-      <p:sp>
-        <p:nvSpPr>
-          <p:cNvPr id="7" name="Rectangle 6"/>
-          <p:cNvSpPr/>
-          <p:nvPr/>
-        </p:nvSpPr>
-        <p:spPr>
-          <a:xfrm>
-            <a:off x="502920" y="1810512"/>
-            <a:ext cx="5410047" cy="3675888"/>
+      <p:pic>
+        <p:nvPicPr>
+          <p:cNvPr id="7" name="Picture 6" descr="vehicle-turn-signal-left.jpg"/>
+          <p:cNvPicPr>
+            <a:picLocks noChangeAspect="1"/>
+          </p:cNvPicPr>
+          <p:nvPr/>
+        </p:nvPicPr>
+        <p:blipFill>
+          <a:blip r:embed="rId2"/>
+          <a:stretch>
+            <a:fillRect/>
+          </a:stretch>
+        </p:blipFill>
+        <p:spPr>
+          <a:xfrm>
+            <a:off x="757351" y="1810512"/>
+            <a:ext cx="4901184" cy="3675888"/>
           </a:xfrm>
           <a:prstGeom prst="rect">
             <a:avLst/>
           </a:prstGeom>
-          <a:solidFill>
-            <a:srgbClr val="EEF3F8"/>
-          </a:solidFill>
-          <a:ln w="19050">
-            <a:solidFill>
-              <a:srgbClr val="0E7C86"/>
-            </a:solidFill>
-            <a:prstDash val="dash"/>
-          </a:ln>
-          <a:effectLst/>
-        </p:spPr>
-        <p:style>
-          <a:lnRef idx="1">
-            <a:schemeClr val="accent1"/>
-          </a:lnRef>
-          <a:fillRef idx="3">
-            <a:schemeClr val="accent1"/>
-          </a:fillRef>
-          <a:effectRef idx="2">
-            <a:schemeClr val="accent1"/>
-          </a:effectRef>
-          <a:fontRef idx="minor">
-            <a:schemeClr val="lt1"/>
-          </a:fontRef>
-        </p:style>
-        <p:txBody>
-          <a:bodyPr rtlCol="0" anchor="ctr" wrap="square" lIns="164592" rIns="164592" tIns="109728" bIns="109728"/>
-          <a:lstStyle/>
-          <a:p>
-            <a:pPr algn="ctr">
-              <a:lnSpc>
-                <a:spcPct val="100000"/>
-              </a:lnSpc>
-              <a:spcAft>
-                <a:spcPts val="700"/>
-              </a:spcAft>
-              <a:defRPr sz="1600" b="0">
-                <a:solidFill>
-                  <a:srgbClr val="0E7C86"/>
-                </a:solidFill>
-                <a:latin typeface="Calibri"/>
-              </a:defRPr>
-            </a:pPr>
-            <a:r>
-              <a:rPr sz="1600" b="1">
-                <a:solidFill>
-                  <a:srgbClr val="666666"/>
-                </a:solidFill>
-                <a:latin typeface="Calibri"/>
-              </a:rPr>
-              <a:t>PLACEHOLDER</a:t>
-            </a:r>
-          </a:p>
-          <a:p>
-            <a:pPr algn="ctr">
-              <a:lnSpc>
-                <a:spcPct val="100000"/>
-              </a:lnSpc>
-              <a:spcAft>
-                <a:spcPts val="700"/>
-              </a:spcAft>
-              <a:defRPr sz="1600" b="0">
-                <a:solidFill>
-                  <a:srgbClr val="0E7C86"/>
-                </a:solidFill>
-                <a:latin typeface="Calibri"/>
-              </a:defRPr>
-            </a:pPr>
-            <a:r>
-              <a:rPr sz="1600" b="0">
-                <a:solidFill>
-                  <a:srgbClr val="0E7C86"/>
-                </a:solidFill>
-                <a:latin typeface="Calibri"/>
-              </a:rPr>
-              <a:t>PHOTO: left turn signal, front and back</a:t>
-            </a:r>
-          </a:p>
-          <a:p>
-            <a:pPr algn="ctr">
-              <a:lnSpc>
-                <a:spcPct val="100000"/>
-              </a:lnSpc>
-              <a:spcAft>
-                <a:spcPts val="700"/>
-              </a:spcAft>
-              <a:defRPr sz="1600" b="0">
-                <a:solidFill>
-                  <a:srgbClr val="0E7C86"/>
-                </a:solidFill>
-                <a:latin typeface="Calibri"/>
-              </a:defRPr>
-            </a:pPr>
-            <a:r>
-              <a:rPr sz="1600" b="0">
-                <a:solidFill>
-                  <a:srgbClr val="0E7C86"/>
-                </a:solidFill>
-                <a:latin typeface="Calibri"/>
-              </a:rPr>
-              <a:t>Three-quarter view with the LEFT indicator running, taken so that BOTH the front bar and the rear bar are visible at once.</a:t>
-            </a:r>
-          </a:p>
-        </p:txBody>
-      </p:sp>
-      <p:sp>
-        <p:nvSpPr>
-          <p:cNvPr id="8" name="TextBox 7"/>
+        </p:spPr>
+      </p:pic>
+      <p:pic>
+        <p:nvPicPr>
+          <p:cNvPr id="8" name="Picture 7" descr="vehicle-turn-signal-right.jpg"/>
+          <p:cNvPicPr>
+            <a:picLocks noChangeAspect="1"/>
+          </p:cNvPicPr>
+          <p:nvPr/>
+        </p:nvPicPr>
+        <p:blipFill>
+          <a:blip r:embed="rId3"/>
+          <a:stretch>
+            <a:fillRect/>
+          </a:stretch>
+        </p:blipFill>
+        <p:spPr>
+          <a:xfrm>
+            <a:off x="6533158" y="1810512"/>
+            <a:ext cx="4901184" cy="3675888"/>
+          </a:xfrm>
+          <a:prstGeom prst="rect">
+            <a:avLst/>
+          </a:prstGeom>
+        </p:spPr>
+      </p:pic>
+      <p:sp>
+        <p:nvSpPr>
+          <p:cNvPr id="9" name="TextBox 8"/>
           <p:cNvSpPr txBox="1"/>
           <p:nvPr/>
         </p:nvSpPr>
@@ -38135,126 +38064,7 @@
                 </a:solidFill>
                 <a:latin typeface="Calibri"/>
               </a:rPr>
-              <a:t>Left turn signal - front bar and rear bar, both on that side</a:t>
-            </a:r>
-          </a:p>
-        </p:txBody>
-      </p:sp>
-      <p:sp>
-        <p:nvSpPr>
-          <p:cNvPr id="9" name="Rectangle 8"/>
-          <p:cNvSpPr/>
-          <p:nvPr/>
-        </p:nvSpPr>
-        <p:spPr>
-          <a:xfrm>
-            <a:off x="6278727" y="1810512"/>
-            <a:ext cx="5410047" cy="3675888"/>
-          </a:xfrm>
-          <a:prstGeom prst="rect">
-            <a:avLst/>
-          </a:prstGeom>
-          <a:solidFill>
-            <a:srgbClr val="EEF3F8"/>
-          </a:solidFill>
-          <a:ln w="19050">
-            <a:solidFill>
-              <a:srgbClr val="0E7C86"/>
-            </a:solidFill>
-            <a:prstDash val="dash"/>
-          </a:ln>
-          <a:effectLst/>
-        </p:spPr>
-        <p:style>
-          <a:lnRef idx="1">
-            <a:schemeClr val="accent1"/>
-          </a:lnRef>
-          <a:fillRef idx="3">
-            <a:schemeClr val="accent1"/>
-          </a:fillRef>
-          <a:effectRef idx="2">
-            <a:schemeClr val="accent1"/>
-          </a:effectRef>
-          <a:fontRef idx="minor">
-            <a:schemeClr val="lt1"/>
-          </a:fontRef>
-        </p:style>
-        <p:txBody>
-          <a:bodyPr rtlCol="0" anchor="ctr" wrap="square" lIns="164592" rIns="164592" tIns="109728" bIns="109728"/>
-          <a:lstStyle/>
-          <a:p>
-            <a:pPr algn="ctr">
-              <a:lnSpc>
-                <a:spcPct val="100000"/>
-              </a:lnSpc>
-              <a:spcAft>
-                <a:spcPts val="700"/>
-              </a:spcAft>
-              <a:defRPr sz="1600" b="0">
-                <a:solidFill>
-                  <a:srgbClr val="0E7C86"/>
-                </a:solidFill>
-                <a:latin typeface="Calibri"/>
-              </a:defRPr>
-            </a:pPr>
-            <a:r>
-              <a:rPr sz="1600" b="1">
-                <a:solidFill>
-                  <a:srgbClr val="666666"/>
-                </a:solidFill>
-                <a:latin typeface="Calibri"/>
-              </a:rPr>
-              <a:t>PLACEHOLDER</a:t>
-            </a:r>
-          </a:p>
-          <a:p>
-            <a:pPr algn="ctr">
-              <a:lnSpc>
-                <a:spcPct val="100000"/>
-              </a:lnSpc>
-              <a:spcAft>
-                <a:spcPts val="700"/>
-              </a:spcAft>
-              <a:defRPr sz="1600" b="0">
-                <a:solidFill>
-                  <a:srgbClr val="0E7C86"/>
-                </a:solidFill>
-                <a:latin typeface="Calibri"/>
-              </a:defRPr>
-            </a:pPr>
-            <a:r>
-              <a:rPr sz="1600" b="0">
-                <a:solidFill>
-                  <a:srgbClr val="0E7C86"/>
-                </a:solidFill>
-                <a:latin typeface="Calibri"/>
-              </a:rPr>
-              <a:t>PHOTO: right turn signal, front and back</a:t>
-            </a:r>
-          </a:p>
-          <a:p>
-            <a:pPr algn="ctr">
-              <a:lnSpc>
-                <a:spcPct val="100000"/>
-              </a:lnSpc>
-              <a:spcAft>
-                <a:spcPts val="700"/>
-              </a:spcAft>
-              <a:defRPr sz="1600" b="0">
-                <a:solidFill>
-                  <a:srgbClr val="0E7C86"/>
-                </a:solidFill>
-                <a:latin typeface="Calibri"/>
-              </a:defRPr>
-            </a:pPr>
-            <a:r>
-              <a:rPr sz="1600" b="0">
-                <a:solidFill>
-                  <a:srgbClr val="0E7C86"/>
-                </a:solidFill>
-                <a:latin typeface="Calibri"/>
-              </a:rPr>
-              <a:t>The same shot from the other side, with the RIGHT indicator running. Front and rear bars both visible.</a:t>
+              <a:t>LEFT turn signal, from the front. The rear bar is lit on the same side at the same time.</a:t>
             </a:r>
           </a:p>
         </p:txBody>
@@ -38302,7 +38112,7 @@
                 </a:solidFill>
                 <a:latin typeface="Calibri"/>
               </a:rPr>
-              <a:t>Right turn signal - the same program, and the same 32 LEDs</a:t>
+              <a:t>RIGHT turn signal. Same vehicle, same program, same 32 LEDs - the D-pad just went the other way.</a:t>
             </a:r>
           </a:p>
         </p:txBody>

--- a/ground-vehicle/docs/courses/beginner-switch/l1_introduction.pptx
+++ b/ground-vehicle/docs/courses/beginner-switch/l1_introduction.pptx
@@ -2065,6 +2065,14 @@
                 <a:latin typeface="Calibri"/>
               </a:rPr>
               <a:t>The URL is the part everybody mistypes. Have it ready to paste into the chat, or written on the board, rather than reading it out.</a:t>
+            </a:r>
+          </a:p>
+          <a:p>
+            <a:r>
+              <a:rPr sz="1200">
+                <a:latin typeface="Calibri"/>
+              </a:rPr>
+              <a:t>The screenshot is the real dialog. Point at the bottom row - the box is easy to miss, and it is the one field on the page that matters today.</a:t>
             </a:r>
           </a:p>
           <a:p>
@@ -18043,7 +18051,7 @@
         <p:spPr>
           <a:xfrm>
             <a:off x="8556736" y="1188720"/>
-            <a:ext cx="3132039" cy="3840480"/>
+            <a:ext cx="3132039" cy="3291840"/>
           </a:xfrm>
           <a:prstGeom prst="rect">
             <a:avLst/>
@@ -18148,14 +18156,62 @@
                 </a:solidFill>
                 <a:latin typeface="Calibri"/>
               </a:rPr>
-              <a:t>File &gt; Preferences with the URL above pasted into the "Additional boards manager URLs" box, so students can see exactly which field it goes in.</a:t>
-            </a:r>
-          </a:p>
-        </p:txBody>
-      </p:sp>
-      <p:sp>
-        <p:nvSpPr>
-          <p:cNvPr id="8" name="Rounded Rectangle 7"/>
+              <a:t>File &gt; Preferences with the bluepad32 URL above pasted into the "Additional boards manager URLs" box. Kevin's screenshot shows the espressif URL, which is the PS3 track's.</a:t>
+            </a:r>
+          </a:p>
+        </p:txBody>
+      </p:sp>
+      <p:sp>
+        <p:nvSpPr>
+          <p:cNvPr id="8" name="TextBox 7"/>
+          <p:cNvSpPr txBox="1"/>
+          <p:nvPr/>
+        </p:nvSpPr>
+        <p:spPr>
+          <a:xfrm>
+            <a:off x="8556736" y="4535424"/>
+            <a:ext cx="3132039" cy="566928"/>
+          </a:xfrm>
+          <a:prstGeom prst="rect">
+            <a:avLst/>
+          </a:prstGeom>
+          <a:noFill/>
+        </p:spPr>
+        <p:txBody>
+          <a:bodyPr wrap="square" lIns="0" tIns="0" rIns="0" bIns="0">
+            <a:spAutoFit/>
+          </a:bodyPr>
+          <a:lstStyle/>
+          <a:p>
+            <a:pPr algn="l">
+              <a:lnSpc>
+                <a:spcPct val="100000"/>
+              </a:lnSpc>
+              <a:spcAft>
+                <a:spcPts val="600"/>
+              </a:spcAft>
+              <a:defRPr sz="1800" b="0">
+                <a:solidFill>
+                  <a:srgbClr val="666666"/>
+                </a:solidFill>
+                <a:latin typeface="Calibri"/>
+              </a:defRPr>
+            </a:pPr>
+            <a:r>
+              <a:rPr sz="1800" b="0">
+                <a:solidFill>
+                  <a:srgbClr val="666666"/>
+                </a:solidFill>
+                <a:latin typeface="Calibri"/>
+              </a:rPr>
+              <a:t>It is the bottom row</a:t>
+            </a:r>
+          </a:p>
+        </p:txBody>
+      </p:sp>
+      <p:sp>
+        <p:nvSpPr>
+          <p:cNvPr id="9" name="Rounded Rectangle 8"/>
           <p:cNvSpPr/>
           <p:nvPr/>
         </p:nvSpPr>

--- a/ground-vehicle/docs/courses/beginner-switch/l1_introduction.pptx
+++ b/ground-vehicle/docs/courses/beginner-switch/l1_introduction.pptx
@@ -1420,14 +1420,6 @@
               <a:t>The two facts worth saying out loud: GPIO 34 to 39 are INPUT ONLY and have no internal pull-up, and GPIO 0 is the BOOT button, so holding it down at reset does something special.</a:t>
             </a:r>
           </a:p>
-          <a:p>
-            <a:r>
-              <a:rPr sz="1200">
-                <a:latin typeface="Calibri"/>
-              </a:rPr>
-              <a:t>Worth printing and taping inside the lid of the parts box.</a:t>
-            </a:r>
-          </a:p>
         </p:txBody>
       </p:sp>
       <p:sp>
@@ -1611,6 +1603,14 @@
               <a:rPr sz="1200">
                 <a:latin typeface="Calibri"/>
               </a:rPr>
+              <a:t>Ask first, before any of this: hands up for anybody who has met Arduino, the ESP-32, C++ or Ohm's law before. It changes who you pair with whom, and it tells you which of the four objectives is going to be the slow one.</a:t>
+            </a:r>
+          </a:p>
+          <a:p>
+            <a:r>
+              <a:rPr sz="1200">
+                <a:latin typeface="Calibri"/>
+              </a:rPr>
               <a:t>Objective four - saying why the resistor is there - is the one that separates following instructions from understanding. Watch for it.</a:t>
             </a:r>
           </a:p>
@@ -4564,6 +4564,14 @@
                 <a:latin typeface="Calibri"/>
               </a:rPr>
               <a:t>If the whole room is installed and ready early, go straight to the breadboards. Never fill time.</a:t>
+            </a:r>
+          </a:p>
+          <a:p>
+            <a:r>
+              <a:rPr sz="1200">
+                <a:latin typeface="Calibri"/>
+              </a:rPr>
+              <a:t>Breaks are about every hour, or wherever the work reaches a natural stop. Say so at the start, so nobody is wondering.</a:t>
             </a:r>
           </a:p>
         </p:txBody>
@@ -17803,7 +17811,7 @@
         <p:spPr>
           <a:xfrm>
             <a:off x="502920" y="1188720"/>
-            <a:ext cx="7688056" cy="3986784"/>
+            <a:ext cx="7240622" cy="3986784"/>
           </a:xfrm>
           <a:prstGeom prst="rect">
             <a:avLst/>
@@ -17887,7 +17895,7 @@
                 </a:solidFill>
                 <a:latin typeface="Calibri"/>
               </a:rPr>
-              <a:t>2.  Paste this into "Additional boards manager URLs", one line, no spaces:</a:t>
+              <a:t>2.  Paste this into "Additional boards manager URLs":</a:t>
             </a:r>
           </a:p>
           <a:p>
@@ -18012,7 +18020,7 @@
                 </a:solidFill>
                 <a:latin typeface="Calibri"/>
               </a:rPr>
-              <a:t>5.  Choose version 4.1.0 - NOT the latest - and click Install.</a:t>
+              <a:t>5.  Choose version 4.1.0, NOT the latest. Install.</a:t>
             </a:r>
           </a:p>
           <a:p>
@@ -18050,8 +18058,8 @@
         </p:nvSpPr>
         <p:spPr>
           <a:xfrm>
-            <a:off x="8556736" y="1188720"/>
-            <a:ext cx="3132039" cy="3291840"/>
+            <a:off x="8109302" y="1188720"/>
+            <a:ext cx="3579473" cy="3291840"/>
           </a:xfrm>
           <a:prstGeom prst="rect">
             <a:avLst/>
@@ -18169,8 +18177,8 @@
         </p:nvSpPr>
         <p:spPr>
           <a:xfrm>
-            <a:off x="8556736" y="4535424"/>
-            <a:ext cx="3132039" cy="566928"/>
+            <a:off x="8109302" y="4535424"/>
+            <a:ext cx="3579473" cy="566928"/>
           </a:xfrm>
           <a:prstGeom prst="rect">
             <a:avLst/>
@@ -18188,7 +18196,7 @@
                 <a:spcPct val="100000"/>
               </a:lnSpc>
               <a:spcAft>
-                <a:spcPts val="600"/>
+                <a:spcPts val="200"/>
               </a:spcAft>
               <a:defRPr sz="1800" b="0">
                 <a:solidFill>
@@ -18204,7 +18212,7 @@
                 </a:solidFill>
                 <a:latin typeface="Calibri"/>
               </a:rPr>
-              <a:t>It is the bottom row</a:t>
+              <a:t>"Additional board manager URLs" is the bottom row</a:t>
             </a:r>
           </a:p>
         </p:txBody>
@@ -38495,7 +38503,7 @@
                 </a:solidFill>
                 <a:latin typeface="Calibri"/>
               </a:rPr>
-              <a:t>Four servo outputs on the top plate.</a:t>
+              <a:t>Four servo outputs on the control board.</a:t>
             </a:r>
           </a:p>
           <a:p>

--- a/ground-vehicle/docs/courses/beginner-switch/l1_introduction.pptx
+++ b/ground-vehicle/docs/courses/beginner-switch/l1_introduction.pptx
@@ -1118,7 +1118,7 @@
               <a:rPr sz="1200">
                 <a:latin typeface="Calibri"/>
               </a:rPr>
-              <a:t>The placeholder is a photograph we still owe this deck. Until it arrives, demonstrate it instead.</a:t>
+              <a:t>The photograph is the vehicle sitting on its back. What it shows is why it works: the wheels stand proud of the frame on both faces, so there is no wrong way up.</a:t>
             </a:r>
           </a:p>
         </p:txBody>
@@ -3196,7 +3196,7 @@
               <a:rPr sz="1200">
                 <a:latin typeface="Calibri"/>
               </a:rPr>
-              <a:t>The photograph here is still to be taken. Until it arrives, wire one up on the desk and hold it where people can see.</a:t>
+              <a:t>Walk the photograph with them: red into pin 2 on the dev module, yellow into a GND socket on the expansion header. Two wires, and the breadboard is running off the vehicle.</a:t>
             </a:r>
           </a:p>
         </p:txBody>
@@ -9618,7 +9618,7 @@
       </p:sp>
       <p:pic>
         <p:nvPicPr>
-          <p:cNvPr id="7" name="Picture 6" descr="vehicle-gen3-top.jpg"/>
+          <p:cNvPr id="7" name="Picture 6" descr="vehicle-gen1-and-gen2.jpg"/>
           <p:cNvPicPr>
             <a:picLocks noChangeAspect="1"/>
           </p:cNvPicPr>
@@ -9632,6 +9632,30 @@
         </p:blipFill>
         <p:spPr>
           <a:xfrm>
+            <a:off x="502920" y="2421051"/>
+            <a:ext cx="5410047" cy="2454809"/>
+          </a:xfrm>
+          <a:prstGeom prst="rect">
+            <a:avLst/>
+          </a:prstGeom>
+        </p:spPr>
+      </p:pic>
+      <p:pic>
+        <p:nvPicPr>
+          <p:cNvPr id="8" name="Picture 7" descr="vehicle-gen3-top.jpg"/>
+          <p:cNvPicPr>
+            <a:picLocks noChangeAspect="1"/>
+          </p:cNvPicPr>
+          <p:nvPr/>
+        </p:nvPicPr>
+        <p:blipFill>
+          <a:blip r:embed="rId3"/>
+          <a:stretch>
+            <a:fillRect/>
+          </a:stretch>
+        </p:blipFill>
+        <p:spPr>
+          <a:xfrm>
             <a:off x="6533158" y="1810512"/>
             <a:ext cx="4901184" cy="3675888"/>
           </a:xfrm>
@@ -9640,125 +9664,6 @@
           </a:prstGeom>
         </p:spPr>
       </p:pic>
-      <p:sp>
-        <p:nvSpPr>
-          <p:cNvPr id="8" name="Rectangle 7"/>
-          <p:cNvSpPr/>
-          <p:nvPr/>
-        </p:nvSpPr>
-        <p:spPr>
-          <a:xfrm>
-            <a:off x="502920" y="1810512"/>
-            <a:ext cx="5410047" cy="3675888"/>
-          </a:xfrm>
-          <a:prstGeom prst="rect">
-            <a:avLst/>
-          </a:prstGeom>
-          <a:solidFill>
-            <a:srgbClr val="EEF3F8"/>
-          </a:solidFill>
-          <a:ln w="19050">
-            <a:solidFill>
-              <a:srgbClr val="0E7C86"/>
-            </a:solidFill>
-            <a:prstDash val="dash"/>
-          </a:ln>
-          <a:effectLst/>
-        </p:spPr>
-        <p:style>
-          <a:lnRef idx="1">
-            <a:schemeClr val="accent1"/>
-          </a:lnRef>
-          <a:fillRef idx="3">
-            <a:schemeClr val="accent1"/>
-          </a:fillRef>
-          <a:effectRef idx="2">
-            <a:schemeClr val="accent1"/>
-          </a:effectRef>
-          <a:fontRef idx="minor">
-            <a:schemeClr val="lt1"/>
-          </a:fontRef>
-        </p:style>
-        <p:txBody>
-          <a:bodyPr rtlCol="0" anchor="ctr" wrap="square" lIns="164592" rIns="164592" tIns="109728" bIns="109728"/>
-          <a:lstStyle/>
-          <a:p>
-            <a:pPr algn="ctr">
-              <a:lnSpc>
-                <a:spcPct val="100000"/>
-              </a:lnSpc>
-              <a:spcAft>
-                <a:spcPts val="700"/>
-              </a:spcAft>
-              <a:defRPr sz="1600" b="0">
-                <a:solidFill>
-                  <a:srgbClr val="0E7C86"/>
-                </a:solidFill>
-                <a:latin typeface="Calibri"/>
-              </a:defRPr>
-            </a:pPr>
-            <a:r>
-              <a:rPr sz="1600" b="1">
-                <a:solidFill>
-                  <a:srgbClr val="666666"/>
-                </a:solidFill>
-                <a:latin typeface="Calibri"/>
-              </a:rPr>
-              <a:t>PLACEHOLDER</a:t>
-            </a:r>
-          </a:p>
-          <a:p>
-            <a:pPr algn="ctr">
-              <a:lnSpc>
-                <a:spcPct val="100000"/>
-              </a:lnSpc>
-              <a:spcAft>
-                <a:spcPts val="700"/>
-              </a:spcAft>
-              <a:defRPr sz="1600" b="0">
-                <a:solidFill>
-                  <a:srgbClr val="0E7C86"/>
-                </a:solidFill>
-                <a:latin typeface="Calibri"/>
-              </a:defRPr>
-            </a:pPr>
-            <a:r>
-              <a:rPr sz="1600" b="0">
-                <a:solidFill>
-                  <a:srgbClr val="0E7C86"/>
-                </a:solidFill>
-                <a:latin typeface="Calibri"/>
-              </a:rPr>
-              <a:t>PHOTO: Gen 1 and Gen 2 together</a:t>
-            </a:r>
-          </a:p>
-          <a:p>
-            <a:pPr algn="ctr">
-              <a:lnSpc>
-                <a:spcPct val="100000"/>
-              </a:lnSpc>
-              <a:spcAft>
-                <a:spcPts val="700"/>
-              </a:spcAft>
-              <a:defRPr sz="1600" b="0">
-                <a:solidFill>
-                  <a:srgbClr val="0E7C86"/>
-                </a:solidFill>
-                <a:latin typeface="Calibri"/>
-              </a:defRPr>
-            </a:pPr>
-            <a:r>
-              <a:rPr sz="1600" b="0">
-                <a:solidFill>
-                  <a:srgbClr val="0E7C86"/>
-                </a:solidFill>
-                <a:latin typeface="Calibri"/>
-              </a:rPr>
-              <a:t>Gen 1 beside a Gen 2, same angle, so the change in the frame and the electronics is obvious.</a:t>
-            </a:r>
-          </a:p>
-        </p:txBody>
-      </p:sp>
       <p:sp>
         <p:nvSpPr>
           <p:cNvPr id="9" name="TextBox 8"/>
@@ -10743,9 +10648,33 @@
           </a:prstGeom>
         </p:spPr>
       </p:pic>
-      <p:sp>
-        <p:nvSpPr>
-          <p:cNvPr id="8" name="TextBox 7"/>
+      <p:pic>
+        <p:nvPicPr>
+          <p:cNvPr id="8" name="Picture 7" descr="vehicle-gen3-upside-down.jpg"/>
+          <p:cNvPicPr>
+            <a:picLocks noChangeAspect="1"/>
+          </p:cNvPicPr>
+          <p:nvPr/>
+        </p:nvPicPr>
+        <p:blipFill>
+          <a:blip r:embed="rId3"/>
+          <a:stretch>
+            <a:fillRect/>
+          </a:stretch>
+        </p:blipFill>
+        <p:spPr>
+          <a:xfrm>
+            <a:off x="6402886" y="1810512"/>
+            <a:ext cx="5161728" cy="3675888"/>
+          </a:xfrm>
+          <a:prstGeom prst="rect">
+            <a:avLst/>
+          </a:prstGeom>
+        </p:spPr>
+      </p:pic>
+      <p:sp>
+        <p:nvSpPr>
+          <p:cNvPr id="9" name="TextBox 8"/>
           <p:cNvSpPr txBox="1"/>
           <p:nvPr/>
         </p:nvSpPr>
@@ -10793,125 +10722,6 @@
       </p:sp>
       <p:sp>
         <p:nvSpPr>
-          <p:cNvPr id="9" name="Rectangle 8"/>
-          <p:cNvSpPr/>
-          <p:nvPr/>
-        </p:nvSpPr>
-        <p:spPr>
-          <a:xfrm>
-            <a:off x="6278727" y="1810512"/>
-            <a:ext cx="5410047" cy="3675888"/>
-          </a:xfrm>
-          <a:prstGeom prst="rect">
-            <a:avLst/>
-          </a:prstGeom>
-          <a:solidFill>
-            <a:srgbClr val="EEF3F8"/>
-          </a:solidFill>
-          <a:ln w="19050">
-            <a:solidFill>
-              <a:srgbClr val="0E7C86"/>
-            </a:solidFill>
-            <a:prstDash val="dash"/>
-          </a:ln>
-          <a:effectLst/>
-        </p:spPr>
-        <p:style>
-          <a:lnRef idx="1">
-            <a:schemeClr val="accent1"/>
-          </a:lnRef>
-          <a:fillRef idx="3">
-            <a:schemeClr val="accent1"/>
-          </a:fillRef>
-          <a:effectRef idx="2">
-            <a:schemeClr val="accent1"/>
-          </a:effectRef>
-          <a:fontRef idx="minor">
-            <a:schemeClr val="lt1"/>
-          </a:fontRef>
-        </p:style>
-        <p:txBody>
-          <a:bodyPr rtlCol="0" anchor="ctr" wrap="square" lIns="164592" rIns="164592" tIns="109728" bIns="109728"/>
-          <a:lstStyle/>
-          <a:p>
-            <a:pPr algn="ctr">
-              <a:lnSpc>
-                <a:spcPct val="100000"/>
-              </a:lnSpc>
-              <a:spcAft>
-                <a:spcPts val="700"/>
-              </a:spcAft>
-              <a:defRPr sz="1600" b="0">
-                <a:solidFill>
-                  <a:srgbClr val="0E7C86"/>
-                </a:solidFill>
-                <a:latin typeface="Calibri"/>
-              </a:defRPr>
-            </a:pPr>
-            <a:r>
-              <a:rPr sz="1600" b="1">
-                <a:solidFill>
-                  <a:srgbClr val="666666"/>
-                </a:solidFill>
-                <a:latin typeface="Calibri"/>
-              </a:rPr>
-              <a:t>PLACEHOLDER</a:t>
-            </a:r>
-          </a:p>
-          <a:p>
-            <a:pPr algn="ctr">
-              <a:lnSpc>
-                <a:spcPct val="100000"/>
-              </a:lnSpc>
-              <a:spcAft>
-                <a:spcPts val="700"/>
-              </a:spcAft>
-              <a:defRPr sz="1600" b="0">
-                <a:solidFill>
-                  <a:srgbClr val="0E7C86"/>
-                </a:solidFill>
-                <a:latin typeface="Calibri"/>
-              </a:defRPr>
-            </a:pPr>
-            <a:r>
-              <a:rPr sz="1600" b="0">
-                <a:solidFill>
-                  <a:srgbClr val="0E7C86"/>
-                </a:solidFill>
-                <a:latin typeface="Calibri"/>
-              </a:rPr>
-              <a:t>PHOTO: a Gen 3 driving upside down</a:t>
-            </a:r>
-          </a:p>
-          <a:p>
-            <a:pPr algn="ctr">
-              <a:lnSpc>
-                <a:spcPct val="100000"/>
-              </a:lnSpc>
-              <a:spcAft>
-                <a:spcPts val="700"/>
-              </a:spcAft>
-              <a:defRPr sz="1600" b="0">
-                <a:solidFill>
-                  <a:srgbClr val="0E7C86"/>
-                </a:solidFill>
-                <a:latin typeface="Calibri"/>
-              </a:defRPr>
-            </a:pPr>
-            <a:r>
-              <a:rPr sz="1600" b="0">
-                <a:solidFill>
-                  <a:srgbClr val="0E7C86"/>
-                </a:solidFill>
-                <a:latin typeface="Calibri"/>
-              </a:rPr>
-              <a:t>Wheels are at the vehicle's vertical center, so it runs either way up. Taken from floor level, mid-drive.</a:t>
-            </a:r>
-          </a:p>
-        </p:txBody>
-      </p:sp>
-      <p:sp>
-        <p:nvSpPr>
           <p:cNvPr id="10" name="TextBox 9"/>
           <p:cNvSpPr txBox="1"/>
           <p:nvPr/>
@@ -10937,7 +10747,7 @@
                 <a:spcPct val="100000"/>
               </a:lnSpc>
               <a:spcAft>
-                <a:spcPts val="600"/>
+                <a:spcPts val="200"/>
               </a:spcAft>
               <a:defRPr sz="1800" b="0">
                 <a:solidFill>
@@ -10953,7 +10763,7 @@
                 </a:solidFill>
                 <a:latin typeface="Calibri"/>
               </a:rPr>
-              <a:t>Flip it over and it keeps going</a:t>
+              <a:t>Flip it over and it keeps going  -  the wheels reach past the frame on both sides</a:t>
             </a:r>
           </a:p>
         </p:txBody>
@@ -14789,125 +14599,30 @@
           </a:p>
         </p:txBody>
       </p:sp>
-      <p:sp>
-        <p:nvSpPr>
-          <p:cNvPr id="6" name="Rectangle 5"/>
-          <p:cNvSpPr/>
-          <p:nvPr/>
-        </p:nvSpPr>
-        <p:spPr>
-          <a:xfrm>
-            <a:off x="502920" y="1188720"/>
-            <a:ext cx="11185855" cy="4343400"/>
+      <p:pic>
+        <p:nvPicPr>
+          <p:cNvPr id="6" name="Picture 5" descr="control-board-schematic.jpg"/>
+          <p:cNvPicPr>
+            <a:picLocks noChangeAspect="1"/>
+          </p:cNvPicPr>
+          <p:nvPr/>
+        </p:nvPicPr>
+        <p:blipFill>
+          <a:blip r:embed="rId2"/>
+          <a:stretch>
+            <a:fillRect/>
+          </a:stretch>
+        </p:blipFill>
+        <p:spPr>
+          <a:xfrm>
+            <a:off x="2782646" y="1188720"/>
+            <a:ext cx="6626403" cy="4343400"/>
           </a:xfrm>
           <a:prstGeom prst="rect">
             <a:avLst/>
           </a:prstGeom>
-          <a:solidFill>
-            <a:srgbClr val="EEF3F8"/>
-          </a:solidFill>
-          <a:ln w="19050">
-            <a:solidFill>
-              <a:srgbClr val="0E7C86"/>
-            </a:solidFill>
-            <a:prstDash val="dash"/>
-          </a:ln>
-          <a:effectLst/>
-        </p:spPr>
-        <p:style>
-          <a:lnRef idx="1">
-            <a:schemeClr val="accent1"/>
-          </a:lnRef>
-          <a:fillRef idx="3">
-            <a:schemeClr val="accent1"/>
-          </a:fillRef>
-          <a:effectRef idx="2">
-            <a:schemeClr val="accent1"/>
-          </a:effectRef>
-          <a:fontRef idx="minor">
-            <a:schemeClr val="lt1"/>
-          </a:fontRef>
-        </p:style>
-        <p:txBody>
-          <a:bodyPr rtlCol="0" anchor="ctr" wrap="square" lIns="164592" rIns="164592" tIns="109728" bIns="109728"/>
-          <a:lstStyle/>
-          <a:p>
-            <a:pPr algn="ctr">
-              <a:lnSpc>
-                <a:spcPct val="100000"/>
-              </a:lnSpc>
-              <a:spcAft>
-                <a:spcPts val="700"/>
-              </a:spcAft>
-              <a:defRPr sz="1600" b="0">
-                <a:solidFill>
-                  <a:srgbClr val="0E7C86"/>
-                </a:solidFill>
-                <a:latin typeface="Calibri"/>
-              </a:defRPr>
-            </a:pPr>
-            <a:r>
-              <a:rPr sz="1600" b="1">
-                <a:solidFill>
-                  <a:srgbClr val="666666"/>
-                </a:solidFill>
-                <a:latin typeface="Calibri"/>
-              </a:rPr>
-              <a:t>PLACEHOLDER</a:t>
-            </a:r>
-          </a:p>
-          <a:p>
-            <a:pPr algn="ctr">
-              <a:lnSpc>
-                <a:spcPct val="100000"/>
-              </a:lnSpc>
-              <a:spcAft>
-                <a:spcPts val="700"/>
-              </a:spcAft>
-              <a:defRPr sz="1600" b="0">
-                <a:solidFill>
-                  <a:srgbClr val="0E7C86"/>
-                </a:solidFill>
-                <a:latin typeface="Calibri"/>
-              </a:defRPr>
-            </a:pPr>
-            <a:r>
-              <a:rPr sz="1600" b="0">
-                <a:solidFill>
-                  <a:srgbClr val="0E7C86"/>
-                </a:solidFill>
-                <a:latin typeface="Calibri"/>
-              </a:rPr>
-              <a:t>SCHEMATIC: Gen 3 control board</a:t>
-            </a:r>
-          </a:p>
-          <a:p>
-            <a:pPr algn="ctr">
-              <a:lnSpc>
-                <a:spcPct val="100000"/>
-              </a:lnSpc>
-              <a:spcAft>
-                <a:spcPts val="700"/>
-              </a:spcAft>
-              <a:defRPr sz="1600" b="0">
-                <a:solidFill>
-                  <a:srgbClr val="0E7C86"/>
-                </a:solidFill>
-                <a:latin typeface="Calibri"/>
-              </a:defRPr>
-            </a:pPr>
-            <a:r>
-              <a:rPr sz="1600" b="0">
-                <a:solidFill>
-                  <a:srgbClr val="0E7C86"/>
-                </a:solidFill>
-                <a:latin typeface="Calibri"/>
-              </a:rPr>
-              <a:t>The full circuit diagram, exported as an image. A reference page - nobody is asked to read it today.</a:t>
-            </a:r>
-          </a:p>
-        </p:txBody>
-      </p:sp>
+        </p:spPr>
+      </p:pic>
       <p:sp>
         <p:nvSpPr>
           <p:cNvPr id="7" name="TextBox 6"/>
@@ -18050,125 +17765,30 @@
           </a:p>
         </p:txBody>
       </p:sp>
-      <p:sp>
-        <p:nvSpPr>
-          <p:cNvPr id="7" name="Rectangle 6"/>
-          <p:cNvSpPr/>
-          <p:nvPr/>
-        </p:nvSpPr>
-        <p:spPr>
-          <a:xfrm>
-            <a:off x="8109302" y="1188720"/>
-            <a:ext cx="3579473" cy="3291840"/>
+      <p:pic>
+        <p:nvPicPr>
+          <p:cNvPr id="7" name="Picture 6" descr="ide-preferences-boards-url-switch.png"/>
+          <p:cNvPicPr>
+            <a:picLocks noChangeAspect="1"/>
+          </p:cNvPicPr>
+          <p:nvPr/>
+        </p:nvPicPr>
+        <p:blipFill>
+          <a:blip r:embed="rId2"/>
+          <a:stretch>
+            <a:fillRect/>
+          </a:stretch>
+        </p:blipFill>
+        <p:spPr>
+          <a:xfrm>
+            <a:off x="8109302" y="1673039"/>
+            <a:ext cx="3579473" cy="2323201"/>
           </a:xfrm>
           <a:prstGeom prst="rect">
             <a:avLst/>
           </a:prstGeom>
-          <a:solidFill>
-            <a:srgbClr val="EEF3F8"/>
-          </a:solidFill>
-          <a:ln w="19050">
-            <a:solidFill>
-              <a:srgbClr val="0E7C86"/>
-            </a:solidFill>
-            <a:prstDash val="dash"/>
-          </a:ln>
-          <a:effectLst/>
-        </p:spPr>
-        <p:style>
-          <a:lnRef idx="1">
-            <a:schemeClr val="accent1"/>
-          </a:lnRef>
-          <a:fillRef idx="3">
-            <a:schemeClr val="accent1"/>
-          </a:fillRef>
-          <a:effectRef idx="2">
-            <a:schemeClr val="accent1"/>
-          </a:effectRef>
-          <a:fontRef idx="minor">
-            <a:schemeClr val="lt1"/>
-          </a:fontRef>
-        </p:style>
-        <p:txBody>
-          <a:bodyPr rtlCol="0" anchor="ctr" wrap="square" lIns="164592" rIns="164592" tIns="109728" bIns="109728"/>
-          <a:lstStyle/>
-          <a:p>
-            <a:pPr algn="ctr">
-              <a:lnSpc>
-                <a:spcPct val="100000"/>
-              </a:lnSpc>
-              <a:spcAft>
-                <a:spcPts val="700"/>
-              </a:spcAft>
-              <a:defRPr sz="1600" b="0">
-                <a:solidFill>
-                  <a:srgbClr val="0E7C86"/>
-                </a:solidFill>
-                <a:latin typeface="Calibri"/>
-              </a:defRPr>
-            </a:pPr>
-            <a:r>
-              <a:rPr sz="1600" b="1">
-                <a:solidFill>
-                  <a:srgbClr val="666666"/>
-                </a:solidFill>
-                <a:latin typeface="Calibri"/>
-              </a:rPr>
-              <a:t>PLACEHOLDER</a:t>
-            </a:r>
-          </a:p>
-          <a:p>
-            <a:pPr algn="ctr">
-              <a:lnSpc>
-                <a:spcPct val="100000"/>
-              </a:lnSpc>
-              <a:spcAft>
-                <a:spcPts val="700"/>
-              </a:spcAft>
-              <a:defRPr sz="1600" b="0">
-                <a:solidFill>
-                  <a:srgbClr val="0E7C86"/>
-                </a:solidFill>
-                <a:latin typeface="Calibri"/>
-              </a:defRPr>
-            </a:pPr>
-            <a:r>
-              <a:rPr sz="1600" b="0">
-                <a:solidFill>
-                  <a:srgbClr val="0E7C86"/>
-                </a:solidFill>
-                <a:latin typeface="Calibri"/>
-              </a:rPr>
-              <a:t>SCREENSHOT: Arduino IDE Preferences</a:t>
-            </a:r>
-          </a:p>
-          <a:p>
-            <a:pPr algn="ctr">
-              <a:lnSpc>
-                <a:spcPct val="100000"/>
-              </a:lnSpc>
-              <a:spcAft>
-                <a:spcPts val="700"/>
-              </a:spcAft>
-              <a:defRPr sz="1600" b="0">
-                <a:solidFill>
-                  <a:srgbClr val="0E7C86"/>
-                </a:solidFill>
-                <a:latin typeface="Calibri"/>
-              </a:defRPr>
-            </a:pPr>
-            <a:r>
-              <a:rPr sz="1600" b="0">
-                <a:solidFill>
-                  <a:srgbClr val="0E7C86"/>
-                </a:solidFill>
-                <a:latin typeface="Calibri"/>
-              </a:rPr>
-              <a:t>File &gt; Preferences with the bluepad32 URL above pasted into the "Additional boards manager URLs" box. Kevin's screenshot shows the espressif URL, which is the PS3 track's.</a:t>
-            </a:r>
-          </a:p>
-        </p:txBody>
-      </p:sp>
+        </p:spPr>
+      </p:pic>
       <p:sp>
         <p:nvSpPr>
           <p:cNvPr id="8" name="TextBox 7"/>
@@ -18177,7 +17797,7 @@
         </p:nvSpPr>
         <p:spPr>
           <a:xfrm>
-            <a:off x="8109302" y="4535424"/>
+            <a:off x="8109302" y="4051104"/>
             <a:ext cx="3579473" cy="566928"/>
           </a:xfrm>
           <a:prstGeom prst="rect">
@@ -26368,125 +25988,30 @@
           </a:p>
         </p:txBody>
       </p:sp>
-      <p:sp>
-        <p:nvSpPr>
-          <p:cNvPr id="7" name="Rectangle 6"/>
-          <p:cNvSpPr/>
-          <p:nvPr/>
-        </p:nvSpPr>
-        <p:spPr>
-          <a:xfrm>
-            <a:off x="6766999" y="1188720"/>
-            <a:ext cx="4921776" cy="3291840"/>
+      <p:pic>
+        <p:nvPicPr>
+          <p:cNvPr id="7" name="Picture 6" descr="breadboard-powered-from-vehicle.jpg"/>
+          <p:cNvPicPr>
+            <a:picLocks noChangeAspect="1"/>
+          </p:cNvPicPr>
+          <p:nvPr/>
+        </p:nvPicPr>
+        <p:blipFill>
+          <a:blip r:embed="rId2"/>
+          <a:stretch>
+            <a:fillRect/>
+          </a:stretch>
+        </p:blipFill>
+        <p:spPr>
+          <a:xfrm>
+            <a:off x="7509551" y="1188720"/>
+            <a:ext cx="3436671" cy="3291840"/>
           </a:xfrm>
           <a:prstGeom prst="rect">
             <a:avLst/>
           </a:prstGeom>
-          <a:solidFill>
-            <a:srgbClr val="EEF3F8"/>
-          </a:solidFill>
-          <a:ln w="19050">
-            <a:solidFill>
-              <a:srgbClr val="0E7C86"/>
-            </a:solidFill>
-            <a:prstDash val="dash"/>
-          </a:ln>
-          <a:effectLst/>
-        </p:spPr>
-        <p:style>
-          <a:lnRef idx="1">
-            <a:schemeClr val="accent1"/>
-          </a:lnRef>
-          <a:fillRef idx="3">
-            <a:schemeClr val="accent1"/>
-          </a:fillRef>
-          <a:effectRef idx="2">
-            <a:schemeClr val="accent1"/>
-          </a:effectRef>
-          <a:fontRef idx="minor">
-            <a:schemeClr val="lt1"/>
-          </a:fontRef>
-        </p:style>
-        <p:txBody>
-          <a:bodyPr rtlCol="0" anchor="ctr" wrap="square" lIns="164592" rIns="164592" tIns="109728" bIns="109728"/>
-          <a:lstStyle/>
-          <a:p>
-            <a:pPr algn="ctr">
-              <a:lnSpc>
-                <a:spcPct val="100000"/>
-              </a:lnSpc>
-              <a:spcAft>
-                <a:spcPts val="700"/>
-              </a:spcAft>
-              <a:defRPr sz="1600" b="0">
-                <a:solidFill>
-                  <a:srgbClr val="0E7C86"/>
-                </a:solidFill>
-                <a:latin typeface="Calibri"/>
-              </a:defRPr>
-            </a:pPr>
-            <a:r>
-              <a:rPr sz="1600" b="1">
-                <a:solidFill>
-                  <a:srgbClr val="666666"/>
-                </a:solidFill>
-                <a:latin typeface="Calibri"/>
-              </a:rPr>
-              <a:t>PLACEHOLDER</a:t>
-            </a:r>
-          </a:p>
-          <a:p>
-            <a:pPr algn="ctr">
-              <a:lnSpc>
-                <a:spcPct val="100000"/>
-              </a:lnSpc>
-              <a:spcAft>
-                <a:spcPts val="700"/>
-              </a:spcAft>
-              <a:defRPr sz="1600" b="0">
-                <a:solidFill>
-                  <a:srgbClr val="0E7C86"/>
-                </a:solidFill>
-                <a:latin typeface="Calibri"/>
-              </a:defRPr>
-            </a:pPr>
-            <a:r>
-              <a:rPr sz="1600" b="0">
-                <a:solidFill>
-                  <a:srgbClr val="0E7C86"/>
-                </a:solidFill>
-                <a:latin typeface="Calibri"/>
-              </a:rPr>
-              <a:t>PHOTO: our own breadboard wired to GPIO 2 and GND</a:t>
-            </a:r>
-          </a:p>
-          <a:p>
-            <a:pPr algn="ctr">
-              <a:lnSpc>
-                <a:spcPct val="100000"/>
-              </a:lnSpc>
-              <a:spcAft>
-                <a:spcPts val="700"/>
-              </a:spcAft>
-              <a:defRPr sz="1600" b="0">
-                <a:solidFill>
-                  <a:srgbClr val="0E7C86"/>
-                </a:solidFill>
-                <a:latin typeface="Calibri"/>
-              </a:defRPr>
-            </a:pPr>
-            <a:r>
-              <a:rPr sz="1600" b="0">
-                <a:solidFill>
-                  <a:srgbClr val="0E7C86"/>
-                </a:solidFill>
-                <a:latin typeface="Calibri"/>
-              </a:rPr>
-              <a:t>Same circuit as the previous slide, powered from the vehicle through the top-plate cutout, LED lit.</a:t>
-            </a:r>
-          </a:p>
-        </p:txBody>
-      </p:sp>
+        </p:spPr>
+      </p:pic>
       <p:sp>
         <p:nvSpPr>
           <p:cNvPr id="8" name="TextBox 7"/>
@@ -26495,8 +26020,8 @@
         </p:nvSpPr>
         <p:spPr>
           <a:xfrm>
-            <a:off x="6766999" y="4535424"/>
-            <a:ext cx="4921776" cy="566928"/>
+            <a:off x="7509551" y="4535424"/>
+            <a:ext cx="3436671" cy="566928"/>
           </a:xfrm>
           <a:prstGeom prst="rect">
             <a:avLst/>
